--- a/Y9_Exploring_Science/9A_Genetics_and_evolution/9A_L06_Genes_adaptation_and_extinction.pptx
+++ b/Y9_Exploring_Science/9A_Genetics_and_evolution/9A_L06_Genes_adaptation_and_extinction.pptx
@@ -1740,7 +1740,7 @@
         <p:spPr>
           <a:xfrm>
             <a:off x="548640" y="3657600"/>
-            <a:ext cx="10515600" cy="914400"/>
+            <a:ext cx="10515600" cy="1097280"/>
           </a:xfrm>
           <a:prstGeom prst="rect">
             <a:avLst/>
@@ -1753,7 +1753,7 @@
           <a:lstStyle>
             <a:lvl1pPr indent="0" marL="0">
               <a:buNone/>
-              <a:defRPr lang="en-US" sz="2000" dirty="0">
+              <a:defRPr lang="en-US" sz="2400" dirty="0">
                 <a:solidFill>
                   <a:srgbClr val="FFFFFF"/>
                 </a:solidFill>
@@ -1764,7 +1764,7 @@
             <a:pPr indent="0" marL="0">
               <a:buNone/>
             </a:pPr>
-            <a:endParaRPr lang="en-US" sz="2000" dirty="0"/>
+            <a:endParaRPr lang="en-US" sz="2400" dirty="0"/>
           </a:p>
         </p:txBody>
       </p:sp>
@@ -1864,14 +1864,14 @@
               <a:buNone/>
             </a:pPr>
             <a:r>
-              <a:rPr lang="en-US" sz="900" dirty="0">
+              <a:rPr lang="en-US" sz="1000" dirty="0">
                 <a:solidFill>
                   <a:srgbClr val="5B6574"/>
                 </a:solidFill>
               </a:rPr>
               <a:t>Year 9 Science  |  9A Genetics and evolution  |  Lesson 6: Genes, adaptation and extinction</a:t>
             </a:r>
-            <a:endParaRPr lang="en-US" sz="900" dirty="0"/>
+            <a:endParaRPr lang="en-US" sz="1000" dirty="0"/>
           </a:p>
         </p:txBody>
       </p:sp>
@@ -2040,14 +2040,14 @@
               <a:buNone/>
             </a:pPr>
             <a:r>
-              <a:rPr lang="en-US" sz="900" dirty="0">
+              <a:rPr lang="en-US" sz="1000" dirty="0">
                 <a:solidFill>
                   <a:srgbClr val="5B6574"/>
                 </a:solidFill>
               </a:rPr>
               <a:t>Year 9 Science  |  9A Genetics and evolution  |  Lesson 6: Genes, adaptation and extinction</a:t>
             </a:r>
-            <a:endParaRPr lang="en-US" sz="900" dirty="0"/>
+            <a:endParaRPr lang="en-US" sz="1000" dirty="0"/>
           </a:p>
         </p:txBody>
       </p:sp>
@@ -2216,14 +2216,14 @@
               <a:buNone/>
             </a:pPr>
             <a:r>
-              <a:rPr lang="en-US" sz="900" dirty="0">
+              <a:rPr lang="en-US" sz="1000" dirty="0">
                 <a:solidFill>
                   <a:srgbClr val="5B6574"/>
                 </a:solidFill>
               </a:rPr>
               <a:t>Year 9 Science  |  9A Genetics and evolution  |  Lesson 6: Genes, adaptation and extinction</a:t>
             </a:r>
-            <a:endParaRPr lang="en-US" sz="900" dirty="0"/>
+            <a:endParaRPr lang="en-US" sz="1000" dirty="0"/>
           </a:p>
         </p:txBody>
       </p:sp>
@@ -2352,7 +2352,7 @@
           <a:lstStyle>
             <a:lvl1pPr indent="0" marL="0">
               <a:buNone/>
-              <a:defRPr lang="en-US" sz="3000" b="1" dirty="0">
+              <a:defRPr lang="en-US" sz="3400" b="1" dirty="0">
                 <a:solidFill>
                   <a:srgbClr val="3A2E00"/>
                 </a:solidFill>
@@ -2363,7 +2363,7 @@
             <a:pPr indent="0" marL="0">
               <a:buNone/>
             </a:pPr>
-            <a:endParaRPr lang="en-US" sz="3000" dirty="0"/>
+            <a:endParaRPr lang="en-US" sz="3400" dirty="0"/>
           </a:p>
         </p:txBody>
       </p:sp>
@@ -2780,14 +2780,14 @@
               <a:buNone/>
             </a:pPr>
             <a:r>
-              <a:rPr lang="en-US" sz="1300" b="1" spc="200" kern="0" dirty="0">
+              <a:rPr lang="en-US" sz="1400" b="1" spc="200" kern="0" dirty="0">
                 <a:solidFill>
                   <a:srgbClr val="F2CE3E"/>
                 </a:solidFill>
               </a:rPr>
               <a:t>YEAR 9 SCIENCE  ·  9A GENETICS AND EVOLUTION  ·  LESSON 6 OF 7</a:t>
             </a:r>
-            <a:endParaRPr lang="en-US" sz="1300" dirty="0"/>
+            <a:endParaRPr lang="en-US" sz="1400" dirty="0"/>
           </a:p>
         </p:txBody>
       </p:sp>
@@ -2840,7 +2840,7 @@
         <p:spPr>
           <a:xfrm>
             <a:off x="548640" y="3657600"/>
-            <a:ext cx="10515600" cy="914400"/>
+            <a:ext cx="10515600" cy="1097280"/>
           </a:xfrm>
           <a:prstGeom prst="rect">
             <a:avLst/>
@@ -2856,14 +2856,14 @@
               <a:buNone/>
             </a:pPr>
             <a:r>
-              <a:rPr lang="en-US" sz="2000" dirty="0">
+              <a:rPr lang="en-US" sz="2400" dirty="0">
                 <a:solidFill>
                   <a:srgbClr val="FFFFFF"/>
                 </a:solidFill>
               </a:rPr>
               <a:t>How can genetic information cause extinction?</a:t>
             </a:r>
-            <a:endParaRPr lang="en-US" sz="2000" dirty="0"/>
+            <a:endParaRPr lang="en-US" sz="2400" dirty="0"/>
           </a:p>
         </p:txBody>
       </p:sp>
@@ -2892,14 +2892,14 @@
               <a:buNone/>
             </a:pPr>
             <a:r>
-              <a:rPr lang="en-US" sz="1200" dirty="0">
+              <a:rPr lang="en-US" sz="1400" dirty="0">
                 <a:solidFill>
                   <a:srgbClr val="C9D3E6"/>
                 </a:solidFill>
               </a:rPr>
               <a:t>Exploring Science International 9  ·  Student Book pages 16 to 17  ·  Workbook pages 11 to 12</a:t>
             </a:r>
-            <a:endParaRPr lang="en-US" sz="1200" dirty="0"/>
+            <a:endParaRPr lang="en-US" sz="1400" dirty="0"/>
           </a:p>
         </p:txBody>
       </p:sp>
@@ -3207,23 +3207,21 @@
           <a:ln/>
         </p:spPr>
         <p:txBody>
-          <a:bodyPr wrap="square" lIns="0" tIns="0" rIns="0" bIns="0" rtlCol="0" anchor="t">
-            <a:normAutofit/>
-          </a:bodyPr>
+          <a:bodyPr wrap="square" lIns="0" tIns="0" rIns="0" bIns="0" rtlCol="0" anchor="t"/>
           <a:lstStyle/>
           <a:p>
             <a:pPr indent="0" marL="0">
               <a:buNone/>
             </a:pPr>
             <a:r>
-              <a:rPr lang="en-US" sz="1700" dirty="0">
+              <a:rPr lang="en-US" sz="2000" dirty="0">
                 <a:solidFill>
                   <a:srgbClr val="141B26"/>
                 </a:solidFill>
               </a:rPr>
               <a:t>Core: match the environment words; sand cat gap fill; native species and competition; resources plants compete for.</a:t>
             </a:r>
-            <a:endParaRPr lang="en-US" sz="1700" dirty="0"/>
+            <a:endParaRPr lang="en-US" sz="2000" dirty="0"/>
           </a:p>
         </p:txBody>
       </p:sp>
@@ -3306,23 +3304,21 @@
           <a:ln/>
         </p:spPr>
         <p:txBody>
-          <a:bodyPr wrap="square" lIns="0" tIns="0" rIns="0" bIns="0" rtlCol="0" anchor="t">
-            <a:normAutofit/>
-          </a:bodyPr>
+          <a:bodyPr wrap="square" lIns="0" tIns="0" rIns="0" bIns="0" rtlCol="0" anchor="t"/>
           <a:lstStyle/>
           <a:p>
             <a:pPr indent="0" marL="0">
               <a:buNone/>
             </a:pPr>
             <a:r>
-              <a:rPr lang="en-US" sz="1700" dirty="0">
+              <a:rPr lang="en-US" sz="2000" dirty="0">
                 <a:solidFill>
                   <a:srgbClr val="141B26"/>
                 </a:solidFill>
               </a:rPr>
               <a:t>Stretch: explain the squirrel story with adaptations and genes; reds in conifer forests; the sundew and rising temperature.</a:t>
             </a:r>
-            <a:endParaRPr lang="en-US" sz="1700" dirty="0"/>
+            <a:endParaRPr lang="en-US" sz="2000" dirty="0"/>
           </a:p>
         </p:txBody>
       </p:sp>
@@ -3405,23 +3401,21 @@
           <a:ln/>
         </p:spPr>
         <p:txBody>
-          <a:bodyPr wrap="square" lIns="0" tIns="0" rIns="0" bIns="0" rtlCol="0" anchor="t">
-            <a:normAutofit/>
-          </a:bodyPr>
+          <a:bodyPr wrap="square" lIns="0" tIns="0" rIns="0" bIns="0" rtlCol="0" anchor="t"/>
           <a:lstStyle/>
           <a:p>
             <a:pPr indent="0" marL="0">
               <a:buNone/>
             </a:pPr>
             <a:r>
-              <a:rPr lang="en-US" sz="1700" dirty="0">
+              <a:rPr lang="en-US" sz="2000" dirty="0">
                 <a:solidFill>
                   <a:srgbClr val="141B26"/>
                 </a:solidFill>
               </a:rPr>
               <a:t>Challenge: Haast's eagle and the moa; how a gene bank works and what it cannot do.</a:t>
             </a:r>
-            <a:endParaRPr lang="en-US" sz="1700" dirty="0"/>
+            <a:endParaRPr lang="en-US" sz="2000" dirty="0"/>
           </a:p>
         </p:txBody>
       </p:sp>
@@ -3504,23 +3498,21 @@
           <a:ln/>
         </p:spPr>
         <p:txBody>
-          <a:bodyPr wrap="square" lIns="0" tIns="0" rIns="0" bIns="0" rtlCol="0" anchor="t">
-            <a:normAutofit/>
-          </a:bodyPr>
+          <a:bodyPr wrap="square" lIns="0" tIns="0" rIns="0" bIns="0" rtlCol="0" anchor="t"/>
           <a:lstStyle/>
           <a:p>
             <a:pPr indent="0" marL="0">
               <a:buNone/>
             </a:pPr>
             <a:r>
-              <a:rPr lang="en-US" sz="1700" dirty="0">
+              <a:rPr lang="en-US" sz="2000" dirty="0">
                 <a:solidFill>
                   <a:srgbClr val="141B26"/>
                 </a:solidFill>
               </a:rPr>
               <a:t>Use 'better adapted' and 'genes' in every explanation.</a:t>
             </a:r>
-            <a:endParaRPr lang="en-US" sz="1700" dirty="0"/>
+            <a:endParaRPr lang="en-US" sz="2000" dirty="0"/>
           </a:p>
         </p:txBody>
       </p:sp>
@@ -3549,14 +3541,14 @@
               <a:buNone/>
             </a:pPr>
             <a:r>
-              <a:rPr lang="en-US" sz="1300" i="1" dirty="0">
+              <a:rPr lang="en-US" sz="1500" i="1" dirty="0">
                 <a:solidFill>
                   <a:srgbClr val="5B6574"/>
                 </a:solidFill>
               </a:rPr>
               <a:t>A good explanation says what changed, why the species was no longer well adapted, and what happened to its numbers.</a:t>
             </a:r>
-            <a:endParaRPr lang="en-US" sz="1300" dirty="0"/>
+            <a:endParaRPr lang="en-US" sz="1500" dirty="0"/>
           </a:p>
         </p:txBody>
       </p:sp>
@@ -3749,23 +3741,21 @@
           <a:ln/>
         </p:spPr>
         <p:txBody>
-          <a:bodyPr wrap="square" lIns="0" tIns="0" rIns="0" bIns="0" rtlCol="0" anchor="t">
-            <a:normAutofit/>
-          </a:bodyPr>
+          <a:bodyPr wrap="square" lIns="0" tIns="0" rIns="0" bIns="0" rtlCol="0" anchor="t"/>
           <a:lstStyle/>
           <a:p>
             <a:pPr indent="0" marL="0">
               <a:buNone/>
             </a:pPr>
             <a:r>
-              <a:rPr lang="en-US" sz="2200" b="1" dirty="0">
+              <a:rPr lang="en-US" sz="2300" b="1" dirty="0">
                 <a:solidFill>
                   <a:srgbClr val="0F2A5F"/>
                 </a:solidFill>
               </a:rPr>
               <a:t>Polar bears hunt seals from the sea ice. Global warming is making the Arctic sea ice melt earlier each year. Predict the effect on the polar bear population and explain your reasoning.</a:t>
             </a:r>
-            <a:endParaRPr lang="en-US" sz="2200" dirty="0"/>
+            <a:endParaRPr lang="en-US" sz="2300" dirty="0"/>
           </a:p>
         </p:txBody>
       </p:sp>
@@ -3814,9 +3804,7 @@
           <a:ln/>
         </p:spPr>
         <p:txBody>
-          <a:bodyPr wrap="square" lIns="0" tIns="0" rIns="0" bIns="0" rtlCol="0" anchor="t">
-            <a:normAutofit/>
-          </a:bodyPr>
+          <a:bodyPr wrap="square" lIns="0" tIns="0" rIns="0" bIns="0" rtlCol="0" anchor="t"/>
           <a:lstStyle/>
           <a:p>
             <a:pPr indent="0" marL="0">
@@ -3826,14 +3814,14 @@
               <a:buNone/>
             </a:pPr>
             <a:r>
-              <a:rPr lang="en-US" sz="1500" b="1" dirty="0">
+              <a:rPr lang="en-US" sz="1800" b="1" dirty="0">
                 <a:solidFill>
                   <a:srgbClr val="7B3A8E"/>
                 </a:solidFill>
               </a:rPr>
               <a:t>Sentence frames</a:t>
             </a:r>
-            <a:endParaRPr lang="en-US" sz="1500" dirty="0"/>
+            <a:endParaRPr lang="en-US" sz="1800" dirty="0"/>
           </a:p>
           <a:p>
             <a:pPr indent="0" marL="0">
@@ -3843,14 +3831,14 @@
               <a:buNone/>
             </a:pPr>
             <a:r>
-              <a:rPr lang="en-US" sz="1500" dirty="0">
+              <a:rPr lang="en-US" sz="1800" dirty="0">
                 <a:solidFill>
                   <a:srgbClr val="141B26"/>
                 </a:solidFill>
               </a:rPr>
               <a:t>I predict the population will ___ because ___.</a:t>
             </a:r>
-            <a:endParaRPr lang="en-US" sz="1500" dirty="0"/>
+            <a:endParaRPr lang="en-US" sz="1800" dirty="0"/>
           </a:p>
           <a:p>
             <a:pPr indent="0" marL="0">
@@ -3860,14 +3848,14 @@
               <a:buNone/>
             </a:pPr>
             <a:r>
-              <a:rPr lang="en-US" sz="1500" dirty="0">
+              <a:rPr lang="en-US" sz="1800" dirty="0">
                 <a:solidFill>
                   <a:srgbClr val="141B26"/>
                 </a:solidFill>
               </a:rPr>
               <a:t>The abiotic factor that is changing is ___.</a:t>
             </a:r>
-            <a:endParaRPr lang="en-US" sz="1500" dirty="0"/>
+            <a:endParaRPr lang="en-US" sz="1800" dirty="0"/>
           </a:p>
           <a:p>
             <a:pPr indent="0" marL="0">
@@ -3877,14 +3865,14 @@
               <a:buNone/>
             </a:pPr>
             <a:r>
-              <a:rPr lang="en-US" sz="1500" dirty="0">
+              <a:rPr lang="en-US" sz="1800" dirty="0">
                 <a:solidFill>
                   <a:srgbClr val="141B26"/>
                 </a:solidFill>
               </a:rPr>
               <a:t>Polar bears are adapted to ___, so when ___ they cannot ___.</a:t>
             </a:r>
-            <a:endParaRPr lang="en-US" sz="1500" dirty="0"/>
+            <a:endParaRPr lang="en-US" sz="1800" dirty="0"/>
           </a:p>
         </p:txBody>
       </p:sp>
@@ -3921,7 +3909,7 @@
         <p:spPr>
           <a:xfrm>
             <a:off x="6766560" y="5118584"/>
-            <a:ext cx="4846320" cy="502920"/>
+            <a:ext cx="4846320" cy="548640"/>
           </a:xfrm>
           <a:prstGeom prst="rect">
             <a:avLst/>
@@ -3937,7 +3925,7 @@
               <a:buNone/>
             </a:pPr>
             <a:r>
-              <a:rPr lang="en-US" sz="1100" dirty="0">
+              <a:rPr lang="en-US" sz="1300" dirty="0">
                 <a:solidFill>
                   <a:srgbClr val="141B26"/>
                 </a:solidFill>
@@ -3947,21 +3935,21 @@
             <a:pPr algn="l" indent="0" marL="0">
               <a:buNone/>
             </a:pPr>
-            <a:endParaRPr lang="en-US" sz="1100" dirty="0"/>
+            <a:endParaRPr lang="en-US" sz="1300" dirty="0"/>
           </a:p>
           <a:p>
             <a:pPr algn="l" indent="0" marL="0">
               <a:buNone/>
             </a:pPr>
             <a:r>
-              <a:rPr lang="en-US" sz="800" dirty="0">
+              <a:rPr lang="en-US" sz="900" dirty="0">
                 <a:solidFill>
                   <a:srgbClr val="5B6574"/>
                 </a:solidFill>
               </a:rPr>
               <a:t>Image: Gregory 'Slobirdr' Smith, CC BY-SA 2.0, via Wikimedia Commons</a:t>
             </a:r>
-            <a:endParaRPr lang="en-US" sz="1100" dirty="0"/>
+            <a:endParaRPr lang="en-US" sz="1300" dirty="0"/>
           </a:p>
         </p:txBody>
       </p:sp>
@@ -4161,14 +4149,14 @@
               <a:buNone/>
             </a:pPr>
             <a:r>
-              <a:rPr lang="en-US" sz="1400" i="1" dirty="0">
+              <a:rPr lang="en-US" sz="1600" i="1" dirty="0">
                 <a:solidFill>
                   <a:srgbClr val="5B6574"/>
                 </a:solidFill>
               </a:rPr>
               <a:t>On your worksheet exit ticket. Work alone. Hand it in as you leave.</a:t>
             </a:r>
-            <a:endParaRPr lang="en-US" sz="1400" dirty="0"/>
+            <a:endParaRPr lang="en-US" sz="1600" dirty="0"/>
           </a:p>
         </p:txBody>
       </p:sp>
@@ -4181,25 +4169,23 @@
         <p:spPr>
           <a:xfrm>
             <a:off x="548640" y="1828800"/>
-            <a:ext cx="10881360" cy="1188720"/>
-          </a:xfrm>
-          <a:prstGeom prst="rect">
-            <a:avLst/>
-          </a:prstGeom>
-          <a:noFill/>
-          <a:ln/>
-        </p:spPr>
-        <p:txBody>
-          <a:bodyPr wrap="square" lIns="0" tIns="0" rIns="0" bIns="0" rtlCol="0" anchor="t">
-            <a:normAutofit/>
-          </a:bodyPr>
+            <a:ext cx="9692640" cy="1188720"/>
+          </a:xfrm>
+          <a:prstGeom prst="rect">
+            <a:avLst/>
+          </a:prstGeom>
+          <a:noFill/>
+          <a:ln/>
+        </p:spPr>
+        <p:txBody>
+          <a:bodyPr wrap="square" lIns="0" tIns="0" rIns="0" bIns="0" rtlCol="0" anchor="t"/>
           <a:lstStyle/>
           <a:p>
             <a:pPr indent="0" marL="0">
               <a:buNone/>
             </a:pPr>
             <a:r>
-              <a:rPr lang="en-US" sz="1800" b="1" dirty="0">
+              <a:rPr lang="en-US" sz="2200" b="1" dirty="0">
                 <a:solidFill>
                   <a:srgbClr val="7B3A8E"/>
                 </a:solidFill>
@@ -4210,14 +4196,14 @@
               <a:buNone/>
             </a:pPr>
             <a:r>
-              <a:rPr lang="en-US" sz="1800" dirty="0">
+              <a:rPr lang="en-US" sz="2200" dirty="0">
                 <a:solidFill>
                   <a:srgbClr val="141B26"/>
                 </a:solidFill>
               </a:rPr>
               <a:t>What does it mean if a species is endangered?</a:t>
             </a:r>
-            <a:endParaRPr lang="en-US" sz="1800" dirty="0"/>
+            <a:endParaRPr lang="en-US" sz="2200" dirty="0"/>
           </a:p>
         </p:txBody>
       </p:sp>
@@ -4230,25 +4216,23 @@
         <p:spPr>
           <a:xfrm>
             <a:off x="548640" y="3017520"/>
-            <a:ext cx="10881360" cy="1188720"/>
-          </a:xfrm>
-          <a:prstGeom prst="rect">
-            <a:avLst/>
-          </a:prstGeom>
-          <a:noFill/>
-          <a:ln/>
-        </p:spPr>
-        <p:txBody>
-          <a:bodyPr wrap="square" lIns="0" tIns="0" rIns="0" bIns="0" rtlCol="0" anchor="t">
-            <a:normAutofit/>
-          </a:bodyPr>
+            <a:ext cx="9692640" cy="1188720"/>
+          </a:xfrm>
+          <a:prstGeom prst="rect">
+            <a:avLst/>
+          </a:prstGeom>
+          <a:noFill/>
+          <a:ln/>
+        </p:spPr>
+        <p:txBody>
+          <a:bodyPr wrap="square" lIns="0" tIns="0" rIns="0" bIns="0" rtlCol="0" anchor="t"/>
           <a:lstStyle/>
           <a:p>
             <a:pPr indent="0" marL="0">
               <a:buNone/>
             </a:pPr>
             <a:r>
-              <a:rPr lang="en-US" sz="1800" b="1" dirty="0">
+              <a:rPr lang="en-US" sz="2200" b="1" dirty="0">
                 <a:solidFill>
                   <a:srgbClr val="7B3A8E"/>
                 </a:solidFill>
@@ -4259,14 +4243,14 @@
               <a:buNone/>
             </a:pPr>
             <a:r>
-              <a:rPr lang="en-US" sz="1800" dirty="0">
+              <a:rPr lang="en-US" sz="2200" dirty="0">
                 <a:solidFill>
                   <a:srgbClr val="141B26"/>
                 </a:solidFill>
               </a:rPr>
               <a:t>Give one biotic factor that can cause a species to become extinct.</a:t>
             </a:r>
-            <a:endParaRPr lang="en-US" sz="1800" dirty="0"/>
+            <a:endParaRPr lang="en-US" sz="2200" dirty="0"/>
           </a:p>
         </p:txBody>
       </p:sp>
@@ -4279,25 +4263,23 @@
         <p:spPr>
           <a:xfrm>
             <a:off x="548640" y="4206240"/>
-            <a:ext cx="10881360" cy="1188720"/>
-          </a:xfrm>
-          <a:prstGeom prst="rect">
-            <a:avLst/>
-          </a:prstGeom>
-          <a:noFill/>
-          <a:ln/>
-        </p:spPr>
-        <p:txBody>
-          <a:bodyPr wrap="square" lIns="0" tIns="0" rIns="0" bIns="0" rtlCol="0" anchor="t">
-            <a:normAutofit/>
-          </a:bodyPr>
+            <a:ext cx="9692640" cy="1188720"/>
+          </a:xfrm>
+          <a:prstGeom prst="rect">
+            <a:avLst/>
+          </a:prstGeom>
+          <a:noFill/>
+          <a:ln/>
+        </p:spPr>
+        <p:txBody>
+          <a:bodyPr wrap="square" lIns="0" tIns="0" rIns="0" bIns="0" rtlCol="0" anchor="t"/>
           <a:lstStyle/>
           <a:p>
             <a:pPr indent="0" marL="0">
               <a:buNone/>
             </a:pPr>
             <a:r>
-              <a:rPr lang="en-US" sz="1800" b="1" dirty="0">
+              <a:rPr lang="en-US" sz="2200" b="1" dirty="0">
                 <a:solidFill>
                   <a:srgbClr val="7B3A8E"/>
                 </a:solidFill>
@@ -4308,14 +4290,14 @@
               <a:buNone/>
             </a:pPr>
             <a:r>
-              <a:rPr lang="en-US" sz="1800" dirty="0">
+              <a:rPr lang="en-US" sz="2200" dirty="0">
                 <a:solidFill>
                   <a:srgbClr val="141B26"/>
                 </a:solidFill>
               </a:rPr>
               <a:t>Give one way of preserving biodiversity and say how it works.</a:t>
             </a:r>
-            <a:endParaRPr lang="en-US" sz="1800" dirty="0"/>
+            <a:endParaRPr lang="en-US" sz="2200" dirty="0"/>
           </a:p>
         </p:txBody>
       </p:sp>
@@ -4574,90 +4556,88 @@
         <p:spPr>
           <a:xfrm>
             <a:off x="548640" y="1371600"/>
-            <a:ext cx="10881360" cy="4480560"/>
-          </a:xfrm>
-          <a:prstGeom prst="rect">
-            <a:avLst/>
-          </a:prstGeom>
-          <a:noFill/>
-          <a:ln/>
-        </p:spPr>
-        <p:txBody>
-          <a:bodyPr wrap="square" lIns="0" tIns="0" rIns="0" bIns="0" rtlCol="0" anchor="t">
-            <a:normAutofit/>
-          </a:bodyPr>
+            <a:ext cx="10881360" cy="4114800"/>
+          </a:xfrm>
+          <a:prstGeom prst="rect">
+            <a:avLst/>
+          </a:prstGeom>
+          <a:noFill/>
+          <a:ln/>
+        </p:spPr>
+        <p:txBody>
+          <a:bodyPr wrap="square" lIns="0" tIns="0" rIns="0" bIns="0" rtlCol="0" anchor="t"/>
           <a:lstStyle/>
           <a:p>
             <a:pPr marL="342900" indent="-342900">
               <a:spcAft>
-                <a:spcPts val="1000"/>
+                <a:spcPts val="1200"/>
               </a:spcAft>
               <a:buSzPct val="100000"/>
               <a:buChar char="✓"/>
             </a:pPr>
             <a:r>
-              <a:rPr lang="en-US" sz="1700" dirty="0">
+              <a:rPr lang="en-US" sz="2000" dirty="0">
                 <a:solidFill>
                   <a:srgbClr val="141B26"/>
                 </a:solidFill>
               </a:rPr>
               <a:t>Adaptations come from genes. When abiotic or biotic factors change, a species may no longer be well adapted and can become endangered or extinct.</a:t>
             </a:r>
-            <a:endParaRPr lang="en-US" sz="1700" dirty="0"/>
+            <a:endParaRPr lang="en-US" sz="2000" dirty="0"/>
           </a:p>
           <a:p>
             <a:pPr marL="342900" indent="-342900">
               <a:spcAft>
-                <a:spcPts val="1000"/>
+                <a:spcPts val="1200"/>
               </a:spcAft>
               <a:buSzPct val="100000"/>
               <a:buChar char="✓"/>
             </a:pPr>
             <a:r>
-              <a:rPr lang="en-US" sz="1700" dirty="0">
+              <a:rPr lang="en-US" sz="2000" dirty="0">
                 <a:solidFill>
                   <a:srgbClr val="141B26"/>
                 </a:solidFill>
               </a:rPr>
               <a:t>Competition, disease and human activities are biotic factors that can cause extinction; the grey squirrel out-competes the red.</a:t>
             </a:r>
-            <a:endParaRPr lang="en-US" sz="1700" dirty="0"/>
+            <a:endParaRPr lang="en-US" sz="2000" dirty="0"/>
           </a:p>
           <a:p>
             <a:pPr marL="342900" indent="-342900">
               <a:spcAft>
-                <a:spcPts val="1000"/>
+                <a:spcPts val="1200"/>
               </a:spcAft>
               <a:buSzPct val="100000"/>
               <a:buChar char="✓"/>
             </a:pPr>
             <a:r>
-              <a:rPr lang="en-US" sz="1700" dirty="0">
+              <a:rPr lang="en-US" sz="2000" dirty="0">
                 <a:solidFill>
                   <a:srgbClr val="141B26"/>
                 </a:solidFill>
               </a:rPr>
               <a:t>Biodiversity is the number of different species; losing species damages ecosystems and food webs.</a:t>
             </a:r>
-            <a:endParaRPr lang="en-US" sz="1700" dirty="0"/>
+            <a:endParaRPr lang="en-US" sz="2000" dirty="0"/>
           </a:p>
           <a:p>
             <a:pPr marL="342900" indent="-342900">
               <a:spcAft>
-                <a:spcPts val="1000"/>
+                <a:spcPts val="1200"/>
               </a:spcAft>
               <a:buSzPct val="100000"/>
               <a:buChar char="✓"/>
             </a:pPr>
             <a:r>
-              <a:rPr lang="en-US" sz="1700" dirty="0">
+              <a:rPr lang="en-US" sz="2000" dirty="0">
                 <a:solidFill>
                   <a:srgbClr val="141B26"/>
                 </a:solidFill>
               </a:rPr>
               <a:t>We preserve biodiversity with hunting bans, nature reserves, breeding programmes and gene banks.</a:t>
             </a:r>
-            <a:endParaRPr lang="en-US" sz="1700" dirty="0"/>
+            <a:endParaRPr lang="en-US" sz="2000" dirty="0"/>
           </a:p>
         </p:txBody>
       </p:sp>
@@ -4972,77 +4952,75 @@
           <a:ln/>
         </p:spPr>
         <p:txBody>
-          <a:bodyPr wrap="square" lIns="0" tIns="0" rIns="0" bIns="0" rtlCol="0" anchor="t">
-            <a:normAutofit/>
-          </a:bodyPr>
+          <a:bodyPr wrap="square" lIns="0" tIns="0" rIns="0" bIns="0" rtlCol="0" anchor="t"/>
           <a:lstStyle/>
           <a:p>
             <a:pPr indent="0" marL="0">
               <a:spcAft>
-                <a:spcPts val="1000"/>
+                <a:spcPts val="1200"/>
               </a:spcAft>
               <a:buNone/>
             </a:pPr>
             <a:r>
-              <a:rPr lang="en-US" sz="2000" dirty="0">
+              <a:rPr lang="en-US" sz="2400" dirty="0">
                 <a:solidFill>
                   <a:srgbClr val="141B26"/>
                 </a:solidFill>
               </a:rPr>
               <a:t>About 65 million years ago a giant meteorite hit the Earth near Mexico, throwing up so much dust that it blocked out sunlight. 75% of species became extinct.</a:t>
             </a:r>
-            <a:endParaRPr lang="en-US" sz="2000" dirty="0"/>
+            <a:endParaRPr lang="en-US" sz="2400" dirty="0"/>
           </a:p>
           <a:p>
             <a:pPr indent="0" marL="0">
               <a:spcAft>
-                <a:spcPts val="1000"/>
+                <a:spcPts val="1200"/>
               </a:spcAft>
               <a:buNone/>
             </a:pPr>
             <a:r>
-              <a:rPr lang="en-US" sz="2000" dirty="0">
+              <a:rPr lang="en-US" sz="2400" dirty="0">
                 <a:solidFill>
                   <a:srgbClr val="141B26"/>
                 </a:solidFill>
               </a:rPr>
               <a:t>1. State one physical environmental factor that the meteorite changed.</a:t>
             </a:r>
-            <a:endParaRPr lang="en-US" sz="2000" dirty="0"/>
+            <a:endParaRPr lang="en-US" sz="2400" dirty="0"/>
           </a:p>
           <a:p>
             <a:pPr indent="0" marL="0">
               <a:spcAft>
-                <a:spcPts val="1000"/>
+                <a:spcPts val="1200"/>
               </a:spcAft>
               <a:buNone/>
             </a:pPr>
             <a:r>
-              <a:rPr lang="en-US" sz="2000" dirty="0">
+              <a:rPr lang="en-US" sz="2400" dirty="0">
                 <a:solidFill>
                   <a:srgbClr val="141B26"/>
                 </a:solidFill>
               </a:rPr>
               <a:t>2. Explain the effect this had on plants.</a:t>
             </a:r>
-            <a:endParaRPr lang="en-US" sz="2000" dirty="0"/>
+            <a:endParaRPr lang="en-US" sz="2400" dirty="0"/>
           </a:p>
           <a:p>
             <a:pPr indent="0" marL="0">
               <a:spcAft>
-                <a:spcPts val="1000"/>
+                <a:spcPts val="1200"/>
               </a:spcAft>
               <a:buNone/>
             </a:pPr>
             <a:r>
-              <a:rPr lang="en-US" sz="2000" dirty="0">
+              <a:rPr lang="en-US" sz="2400" dirty="0">
                 <a:solidFill>
                   <a:srgbClr val="141B26"/>
                 </a:solidFill>
               </a:rPr>
               <a:t>3. Explain the effect this had on animals.</a:t>
             </a:r>
-            <a:endParaRPr lang="en-US" sz="2000" dirty="0"/>
+            <a:endParaRPr lang="en-US" sz="2400" dirty="0"/>
           </a:p>
         </p:txBody>
       </p:sp>
@@ -5225,8 +5203,8 @@
         </p:nvSpPr>
         <p:spPr>
           <a:xfrm>
-            <a:off x="548640" y="1325880"/>
-            <a:ext cx="5669280" cy="457200"/>
+            <a:off x="548640" y="1280160"/>
+            <a:ext cx="5486400" cy="411480"/>
           </a:xfrm>
           <a:prstGeom prst="rect">
             <a:avLst/>
@@ -5242,14 +5220,14 @@
               <a:buNone/>
             </a:pPr>
             <a:r>
-              <a:rPr lang="en-US" sz="2000" b="1" dirty="0">
+              <a:rPr lang="en-US" sz="2200" b="1" dirty="0">
                 <a:solidFill>
                   <a:srgbClr val="7B3A8E"/>
                 </a:solidFill>
               </a:rPr>
               <a:t>Today I can ...</a:t>
             </a:r>
-            <a:endParaRPr lang="en-US" sz="2000" dirty="0"/>
+            <a:endParaRPr lang="en-US" sz="2200" dirty="0"/>
           </a:p>
         </p:txBody>
       </p:sp>
@@ -5261,8 +5239,8 @@
         </p:nvSpPr>
         <p:spPr>
           <a:xfrm>
-            <a:off x="594360" y="1947672"/>
-            <a:ext cx="292608" cy="292608"/>
+            <a:off x="594360" y="1810512"/>
+            <a:ext cx="310896" cy="310896"/>
           </a:xfrm>
           <a:prstGeom prst="rect">
             <a:avLst/>
@@ -5286,33 +5264,31 @@
         </p:nvSpPr>
         <p:spPr>
           <a:xfrm>
-            <a:off x="1051560" y="1874520"/>
-            <a:ext cx="5120640" cy="868680"/>
-          </a:xfrm>
-          <a:prstGeom prst="rect">
-            <a:avLst/>
-          </a:prstGeom>
-          <a:noFill/>
-          <a:ln/>
-        </p:spPr>
-        <p:txBody>
-          <a:bodyPr wrap="square" lIns="0" tIns="0" rIns="0" bIns="0" rtlCol="0" anchor="t">
-            <a:normAutofit/>
-          </a:bodyPr>
+            <a:off x="1097280" y="1737360"/>
+            <a:ext cx="10332720" cy="868680"/>
+          </a:xfrm>
+          <a:prstGeom prst="rect">
+            <a:avLst/>
+          </a:prstGeom>
+          <a:noFill/>
+          <a:ln/>
+        </p:spPr>
+        <p:txBody>
+          <a:bodyPr wrap="square" lIns="0" tIns="0" rIns="0" bIns="0" rtlCol="0" anchor="t"/>
           <a:lstStyle/>
           <a:p>
             <a:pPr indent="0" marL="0">
               <a:buNone/>
             </a:pPr>
             <a:r>
-              <a:rPr lang="en-US" sz="1600" dirty="0">
+              <a:rPr lang="en-US" sz="2000" dirty="0">
                 <a:solidFill>
                   <a:srgbClr val="141B26"/>
                 </a:solidFill>
               </a:rPr>
               <a:t>I can explain how changes in abiotic and biotic factors can make a species endangered or extinct, using the idea of adaptations.</a:t>
             </a:r>
-            <a:endParaRPr lang="en-US" sz="1600" dirty="0"/>
+            <a:endParaRPr lang="en-US" sz="2000" dirty="0"/>
           </a:p>
         </p:txBody>
       </p:sp>
@@ -5324,8 +5300,8 @@
         </p:nvSpPr>
         <p:spPr>
           <a:xfrm>
-            <a:off x="594360" y="2907792"/>
-            <a:ext cx="292608" cy="292608"/>
+            <a:off x="594360" y="2679192"/>
+            <a:ext cx="310896" cy="310896"/>
           </a:xfrm>
           <a:prstGeom prst="rect">
             <a:avLst/>
@@ -5349,33 +5325,31 @@
         </p:nvSpPr>
         <p:spPr>
           <a:xfrm>
-            <a:off x="1051560" y="2834640"/>
-            <a:ext cx="5120640" cy="868680"/>
-          </a:xfrm>
-          <a:prstGeom prst="rect">
-            <a:avLst/>
-          </a:prstGeom>
-          <a:noFill/>
-          <a:ln/>
-        </p:spPr>
-        <p:txBody>
-          <a:bodyPr wrap="square" lIns="0" tIns="0" rIns="0" bIns="0" rtlCol="0" anchor="t">
-            <a:normAutofit/>
-          </a:bodyPr>
+            <a:off x="1097280" y="2606040"/>
+            <a:ext cx="10332720" cy="868680"/>
+          </a:xfrm>
+          <a:prstGeom prst="rect">
+            <a:avLst/>
+          </a:prstGeom>
+          <a:noFill/>
+          <a:ln/>
+        </p:spPr>
+        <p:txBody>
+          <a:bodyPr wrap="square" lIns="0" tIns="0" rIns="0" bIns="0" rtlCol="0" anchor="t"/>
           <a:lstStyle/>
           <a:p>
             <a:pPr indent="0" marL="0">
               <a:buNone/>
             </a:pPr>
             <a:r>
-              <a:rPr lang="en-US" sz="1600" dirty="0">
+              <a:rPr lang="en-US" sz="2000" dirty="0">
                 <a:solidFill>
                   <a:srgbClr val="141B26"/>
                 </a:solidFill>
               </a:rPr>
               <a:t>I can describe ways of preserving biodiversity, including nature reserves, breeding programmes and gene banks.</a:t>
             </a:r>
-            <a:endParaRPr lang="en-US" sz="1600" dirty="0"/>
+            <a:endParaRPr lang="en-US" sz="2000" dirty="0"/>
           </a:p>
         </p:txBody>
       </p:sp>
@@ -5387,8 +5361,8 @@
         </p:nvSpPr>
         <p:spPr>
           <a:xfrm>
-            <a:off x="6583680" y="1325880"/>
-            <a:ext cx="5029200" cy="457200"/>
+            <a:off x="548640" y="3611880"/>
+            <a:ext cx="5486400" cy="411480"/>
           </a:xfrm>
           <a:prstGeom prst="rect">
             <a:avLst/>
@@ -5404,14 +5378,14 @@
               <a:buNone/>
             </a:pPr>
             <a:r>
-              <a:rPr lang="en-US" sz="2000" b="1" dirty="0">
+              <a:rPr lang="en-US" sz="2200" b="1" dirty="0">
                 <a:solidFill>
                   <a:srgbClr val="7B3A8E"/>
                 </a:solidFill>
               </a:rPr>
               <a:t>Key words today</a:t>
             </a:r>
-            <a:endParaRPr lang="en-US" sz="2000" dirty="0"/>
+            <a:endParaRPr lang="en-US" sz="2200" dirty="0"/>
           </a:p>
         </p:txBody>
       </p:sp>
@@ -5423,360 +5397,295 @@
         </p:nvSpPr>
         <p:spPr>
           <a:xfrm>
-            <a:off x="6583680" y="1874520"/>
-            <a:ext cx="5029200" cy="4023360"/>
-          </a:xfrm>
-          <a:prstGeom prst="rect">
-            <a:avLst/>
-          </a:prstGeom>
-          <a:noFill/>
-          <a:ln/>
-        </p:spPr>
-        <p:txBody>
-          <a:bodyPr wrap="square" lIns="0" tIns="0" rIns="0" bIns="0" rtlCol="0" anchor="t">
-            <a:normAutofit/>
-          </a:bodyPr>
+            <a:off x="548640" y="4069080"/>
+            <a:ext cx="3515258" cy="1920240"/>
+          </a:xfrm>
+          <a:prstGeom prst="rect">
+            <a:avLst/>
+          </a:prstGeom>
+          <a:noFill/>
+          <a:ln/>
+        </p:spPr>
+        <p:txBody>
+          <a:bodyPr wrap="square" lIns="0" tIns="0" rIns="0" bIns="0" rtlCol="0" anchor="t"/>
+          <a:lstStyle/>
+          <a:p>
+            <a:pPr marL="304800" indent="-304800">
+              <a:spcAft>
+                <a:spcPts val="600"/>
+              </a:spcAft>
+              <a:buSzPct val="100000"/>
+              <a:buChar char="•"/>
+            </a:pPr>
+            <a:r>
+              <a:rPr lang="en-US" sz="2100" b="1" dirty="0">
+                <a:solidFill>
+                  <a:srgbClr val="0F2A5F"/>
+                </a:solidFill>
+              </a:rPr>
+              <a:t>adaptation</a:t>
+            </a:r>
+            <a:endParaRPr lang="en-US" sz="2100" dirty="0"/>
+          </a:p>
+          <a:p>
+            <a:pPr marL="304800" indent="-304800">
+              <a:spcAft>
+                <a:spcPts val="600"/>
+              </a:spcAft>
+              <a:buSzPct val="100000"/>
+              <a:buChar char="•"/>
+            </a:pPr>
+            <a:r>
+              <a:rPr lang="en-US" sz="2100" b="1" dirty="0">
+                <a:solidFill>
+                  <a:srgbClr val="0F2A5F"/>
+                </a:solidFill>
+              </a:rPr>
+              <a:t>endangered</a:t>
+            </a:r>
+            <a:endParaRPr lang="en-US" sz="2100" dirty="0"/>
+          </a:p>
+          <a:p>
+            <a:pPr marL="304800" indent="-304800">
+              <a:spcAft>
+                <a:spcPts val="600"/>
+              </a:spcAft>
+              <a:buSzPct val="100000"/>
+              <a:buChar char="•"/>
+            </a:pPr>
+            <a:r>
+              <a:rPr lang="en-US" sz="2100" b="1" dirty="0">
+                <a:solidFill>
+                  <a:srgbClr val="0F2A5F"/>
+                </a:solidFill>
+              </a:rPr>
+              <a:t>extinct</a:t>
+            </a:r>
+            <a:endParaRPr lang="en-US" sz="2100" dirty="0"/>
+          </a:p>
+          <a:p>
+            <a:pPr marL="304800" indent="-304800">
+              <a:spcAft>
+                <a:spcPts val="600"/>
+              </a:spcAft>
+              <a:buSzPct val="100000"/>
+              <a:buChar char="•"/>
+            </a:pPr>
+            <a:r>
+              <a:rPr lang="en-US" sz="2100" b="1" dirty="0">
+                <a:solidFill>
+                  <a:srgbClr val="0F2A5F"/>
+                </a:solidFill>
+              </a:rPr>
+              <a:t>abiotic factor</a:t>
+            </a:r>
+            <a:endParaRPr lang="en-US" sz="2100" dirty="0"/>
+          </a:p>
+        </p:txBody>
+      </p:sp>
+      <p:sp>
+        <p:nvSpPr>
+          <p:cNvPr id="12" name="Text 10"/>
+          <p:cNvSpPr txBox="1"/>
+          <p:nvPr/>
+        </p:nvSpPr>
+        <p:spPr>
+          <a:xfrm>
+            <a:off x="4338218" y="4069080"/>
+            <a:ext cx="3515258" cy="1920240"/>
+          </a:xfrm>
+          <a:prstGeom prst="rect">
+            <a:avLst/>
+          </a:prstGeom>
+          <a:noFill/>
+          <a:ln/>
+        </p:spPr>
+        <p:txBody>
+          <a:bodyPr wrap="square" lIns="0" tIns="0" rIns="0" bIns="0" rtlCol="0" anchor="t"/>
+          <a:lstStyle/>
+          <a:p>
+            <a:pPr marL="304800" indent="-304800">
+              <a:spcAft>
+                <a:spcPts val="600"/>
+              </a:spcAft>
+              <a:buSzPct val="100000"/>
+              <a:buChar char="•"/>
+            </a:pPr>
+            <a:r>
+              <a:rPr lang="en-US" sz="2100" b="1" dirty="0">
+                <a:solidFill>
+                  <a:srgbClr val="0F2A5F"/>
+                </a:solidFill>
+              </a:rPr>
+              <a:t>biotic factor</a:t>
+            </a:r>
+            <a:endParaRPr lang="en-US" sz="2100" dirty="0"/>
+          </a:p>
+          <a:p>
+            <a:pPr marL="304800" indent="-304800">
+              <a:spcAft>
+                <a:spcPts val="600"/>
+              </a:spcAft>
+              <a:buSzPct val="100000"/>
+              <a:buChar char="•"/>
+            </a:pPr>
+            <a:r>
+              <a:rPr lang="en-US" sz="2100" b="1" dirty="0">
+                <a:solidFill>
+                  <a:srgbClr val="0F2A5F"/>
+                </a:solidFill>
+              </a:rPr>
+              <a:t>competition</a:t>
+            </a:r>
+            <a:endParaRPr lang="en-US" sz="2100" dirty="0"/>
+          </a:p>
+          <a:p>
+            <a:pPr marL="304800" indent="-304800">
+              <a:spcAft>
+                <a:spcPts val="600"/>
+              </a:spcAft>
+              <a:buSzPct val="100000"/>
+              <a:buChar char="•"/>
+            </a:pPr>
+            <a:r>
+              <a:rPr lang="en-US" sz="2100" b="1" dirty="0">
+                <a:solidFill>
+                  <a:srgbClr val="0F2A5F"/>
+                </a:solidFill>
+              </a:rPr>
+              <a:t>native species</a:t>
+            </a:r>
+            <a:endParaRPr lang="en-US" sz="2100" dirty="0"/>
+          </a:p>
+          <a:p>
+            <a:pPr marL="304800" indent="-304800">
+              <a:spcAft>
+                <a:spcPts val="600"/>
+              </a:spcAft>
+              <a:buSzPct val="100000"/>
+              <a:buChar char="•"/>
+            </a:pPr>
+            <a:r>
+              <a:rPr lang="en-US" sz="2100" b="1" dirty="0">
+                <a:solidFill>
+                  <a:srgbClr val="0F2A5F"/>
+                </a:solidFill>
+              </a:rPr>
+              <a:t>biodiversity</a:t>
+            </a:r>
+            <a:endParaRPr lang="en-US" sz="2100" dirty="0"/>
+          </a:p>
+        </p:txBody>
+      </p:sp>
+      <p:sp>
+        <p:nvSpPr>
+          <p:cNvPr id="13" name="Text 11"/>
+          <p:cNvSpPr txBox="1"/>
+          <p:nvPr/>
+        </p:nvSpPr>
+        <p:spPr>
+          <a:xfrm>
+            <a:off x="8127797" y="4069080"/>
+            <a:ext cx="3515258" cy="1920240"/>
+          </a:xfrm>
+          <a:prstGeom prst="rect">
+            <a:avLst/>
+          </a:prstGeom>
+          <a:noFill/>
+          <a:ln/>
+        </p:spPr>
+        <p:txBody>
+          <a:bodyPr wrap="square" lIns="0" tIns="0" rIns="0" bIns="0" rtlCol="0" anchor="t"/>
+          <a:lstStyle/>
+          <a:p>
+            <a:pPr marL="304800" indent="-304800">
+              <a:spcAft>
+                <a:spcPts val="600"/>
+              </a:spcAft>
+              <a:buSzPct val="100000"/>
+              <a:buChar char="•"/>
+            </a:pPr>
+            <a:r>
+              <a:rPr lang="en-US" sz="2200" b="1" dirty="0">
+                <a:solidFill>
+                  <a:srgbClr val="0F2A5F"/>
+                </a:solidFill>
+              </a:rPr>
+              <a:t>nature reserve</a:t>
+            </a:r>
+            <a:endParaRPr lang="en-US" sz="2200" dirty="0"/>
+          </a:p>
+          <a:p>
+            <a:pPr marL="304800" indent="-304800">
+              <a:spcAft>
+                <a:spcPts val="600"/>
+              </a:spcAft>
+              <a:buSzPct val="100000"/>
+              <a:buChar char="•"/>
+            </a:pPr>
+            <a:r>
+              <a:rPr lang="en-US" sz="2200" b="1" dirty="0">
+                <a:solidFill>
+                  <a:srgbClr val="0F2A5F"/>
+                </a:solidFill>
+              </a:rPr>
+              <a:t>breeding programme</a:t>
+            </a:r>
+            <a:endParaRPr lang="en-US" sz="2200" dirty="0"/>
+          </a:p>
+          <a:p>
+            <a:pPr marL="304800" indent="-304800">
+              <a:spcAft>
+                <a:spcPts val="600"/>
+              </a:spcAft>
+              <a:buSzPct val="100000"/>
+              <a:buChar char="•"/>
+            </a:pPr>
+            <a:r>
+              <a:rPr lang="en-US" sz="2200" b="1" dirty="0">
+                <a:solidFill>
+                  <a:srgbClr val="0F2A5F"/>
+                </a:solidFill>
+              </a:rPr>
+              <a:t>gene bank</a:t>
+            </a:r>
+            <a:endParaRPr lang="en-US" sz="2200" dirty="0"/>
+          </a:p>
+        </p:txBody>
+      </p:sp>
+      <p:sp>
+        <p:nvSpPr>
+          <p:cNvPr id="14" name="Text 12"/>
+          <p:cNvSpPr txBox="1"/>
+          <p:nvPr/>
+        </p:nvSpPr>
+        <p:spPr>
+          <a:xfrm>
+            <a:off x="548640" y="6035040"/>
+            <a:ext cx="10881360" cy="320040"/>
+          </a:xfrm>
+          <a:prstGeom prst="rect">
+            <a:avLst/>
+          </a:prstGeom>
+          <a:noFill/>
+          <a:ln/>
+        </p:spPr>
+        <p:txBody>
+          <a:bodyPr wrap="square" lIns="0" tIns="0" rIns="0" bIns="0" rtlCol="0" anchor="ctr"/>
           <a:lstStyle/>
           <a:p>
             <a:pPr indent="0" marL="0">
-              <a:spcAft>
-                <a:spcPts val="500"/>
-              </a:spcAft>
-              <a:buNone/>
-            </a:pPr>
-            <a:r>
-              <a:rPr lang="en-US" sz="1300" b="1" dirty="0">
-                <a:solidFill>
-                  <a:srgbClr val="0F2A5F"/>
-                </a:solidFill>
-              </a:rPr>
-              <a:t>adaptation</a:t>
-            </a:r>
-            <a:pPr indent="0" marL="0">
-              <a:spcAft>
-                <a:spcPts val="500"/>
-              </a:spcAft>
-              <a:buNone/>
-            </a:pPr>
-            <a:r>
-              <a:rPr lang="en-US" sz="1300" dirty="0">
-                <a:solidFill>
-                  <a:srgbClr val="141B26"/>
-                </a:solidFill>
-              </a:rPr>
-              <a:t>  a characteristic that helps an organism survive in its habitat</a:t>
-            </a:r>
-            <a:endParaRPr lang="en-US" sz="1300" dirty="0"/>
-          </a:p>
-          <a:p>
-            <a:pPr indent="0" marL="0">
-              <a:spcAft>
-                <a:spcPts val="500"/>
-              </a:spcAft>
-              <a:buNone/>
-            </a:pPr>
-            <a:r>
-              <a:rPr lang="en-US" sz="1300" b="1" dirty="0">
-                <a:solidFill>
-                  <a:srgbClr val="0F2A5F"/>
-                </a:solidFill>
-              </a:rPr>
-              <a:t>endangered</a:t>
-            </a:r>
-            <a:pPr indent="0" marL="0">
-              <a:spcAft>
-                <a:spcPts val="500"/>
-              </a:spcAft>
-              <a:buNone/>
-            </a:pPr>
-            <a:r>
-              <a:rPr lang="en-US" sz="1300" dirty="0">
-                <a:solidFill>
-                  <a:srgbClr val="141B26"/>
-                </a:solidFill>
-              </a:rPr>
-              <a:t>  a species in danger of becoming extinct</a:t>
-            </a:r>
-            <a:endParaRPr lang="en-US" sz="1300" dirty="0"/>
-          </a:p>
-          <a:p>
-            <a:pPr indent="0" marL="0">
-              <a:spcAft>
-                <a:spcPts val="500"/>
-              </a:spcAft>
-              <a:buNone/>
-            </a:pPr>
-            <a:r>
-              <a:rPr lang="en-US" sz="1300" b="1" dirty="0">
-                <a:solidFill>
-                  <a:srgbClr val="0F2A5F"/>
-                </a:solidFill>
-              </a:rPr>
-              <a:t>extinct</a:t>
-            </a:r>
-            <a:pPr indent="0" marL="0">
-              <a:spcAft>
-                <a:spcPts val="500"/>
-              </a:spcAft>
-              <a:buNone/>
-            </a:pPr>
-            <a:r>
-              <a:rPr lang="en-US" sz="1300" dirty="0">
-                <a:solidFill>
-                  <a:srgbClr val="141B26"/>
-                </a:solidFill>
-              </a:rPr>
-              <a:t>  a species with no living members left</a:t>
-            </a:r>
-            <a:endParaRPr lang="en-US" sz="1300" dirty="0"/>
-          </a:p>
-          <a:p>
-            <a:pPr indent="0" marL="0">
-              <a:spcAft>
-                <a:spcPts val="500"/>
-              </a:spcAft>
-              <a:buNone/>
-            </a:pPr>
-            <a:r>
-              <a:rPr lang="en-US" sz="1300" b="1" dirty="0">
-                <a:solidFill>
-                  <a:srgbClr val="0F2A5F"/>
-                </a:solidFill>
-              </a:rPr>
-              <a:t>abiotic factor</a:t>
-            </a:r>
-            <a:pPr indent="0" marL="0">
-              <a:spcAft>
-                <a:spcPts val="500"/>
-              </a:spcAft>
-              <a:buNone/>
-            </a:pPr>
-            <a:r>
-              <a:rPr lang="en-US" sz="1300" dirty="0">
-                <a:solidFill>
-                  <a:srgbClr val="141B26"/>
-                </a:solidFill>
-              </a:rPr>
-              <a:t>  a non-living part of the environment, e.g. rainfall, temperature</a:t>
-            </a:r>
-            <a:endParaRPr lang="en-US" sz="1300" dirty="0"/>
-          </a:p>
-          <a:p>
-            <a:pPr indent="0" marL="0">
-              <a:spcAft>
-                <a:spcPts val="500"/>
-              </a:spcAft>
-              <a:buNone/>
-            </a:pPr>
-            <a:r>
-              <a:rPr lang="en-US" sz="1300" b="1" dirty="0">
-                <a:solidFill>
-                  <a:srgbClr val="0F2A5F"/>
-                </a:solidFill>
-              </a:rPr>
-              <a:t>biotic factor</a:t>
-            </a:r>
-            <a:pPr indent="0" marL="0">
-              <a:spcAft>
-                <a:spcPts val="500"/>
-              </a:spcAft>
-              <a:buNone/>
-            </a:pPr>
-            <a:r>
-              <a:rPr lang="en-US" sz="1300" dirty="0">
-                <a:solidFill>
-                  <a:srgbClr val="141B26"/>
-                </a:solidFill>
-              </a:rPr>
-              <a:t>  the activities of other organisms, e.g. competition, disease, hunting</a:t>
-            </a:r>
-            <a:endParaRPr lang="en-US" sz="1300" dirty="0"/>
-          </a:p>
-          <a:p>
-            <a:pPr indent="0" marL="0">
-              <a:spcAft>
-                <a:spcPts val="500"/>
-              </a:spcAft>
-              <a:buNone/>
-            </a:pPr>
-            <a:r>
-              <a:rPr lang="en-US" sz="1300" b="1" dirty="0">
-                <a:solidFill>
-                  <a:srgbClr val="0F2A5F"/>
-                </a:solidFill>
-              </a:rPr>
-              <a:t>competition</a:t>
-            </a:r>
-            <a:pPr indent="0" marL="0">
-              <a:spcAft>
-                <a:spcPts val="500"/>
-              </a:spcAft>
-              <a:buNone/>
-            </a:pPr>
-            <a:r>
-              <a:rPr lang="en-US" sz="1300" dirty="0">
-                <a:solidFill>
-                  <a:srgbClr val="141B26"/>
-                </a:solidFill>
-              </a:rPr>
-              <a:t>  when organisms need the same limited resource, e.g. food or light</a:t>
-            </a:r>
-            <a:endParaRPr lang="en-US" sz="1300" dirty="0"/>
-          </a:p>
-          <a:p>
-            <a:pPr indent="0" marL="0">
-              <a:spcAft>
-                <a:spcPts val="500"/>
-              </a:spcAft>
-              <a:buNone/>
-            </a:pPr>
-            <a:r>
-              <a:rPr lang="en-US" sz="1300" b="1" dirty="0">
-                <a:solidFill>
-                  <a:srgbClr val="0F2A5F"/>
-                </a:solidFill>
-              </a:rPr>
-              <a:t>native species</a:t>
-            </a:r>
-            <a:pPr indent="0" marL="0">
-              <a:spcAft>
-                <a:spcPts val="500"/>
-              </a:spcAft>
-              <a:buNone/>
-            </a:pPr>
-            <a:r>
-              <a:rPr lang="en-US" sz="1300" dirty="0">
-                <a:solidFill>
-                  <a:srgbClr val="141B26"/>
-                </a:solidFill>
-              </a:rPr>
-              <a:t>  a species that is naturally found in a part of the world</a:t>
-            </a:r>
-            <a:endParaRPr lang="en-US" sz="1300" dirty="0"/>
-          </a:p>
-          <a:p>
-            <a:pPr indent="0" marL="0">
-              <a:spcAft>
-                <a:spcPts val="500"/>
-              </a:spcAft>
-              <a:buNone/>
-            </a:pPr>
-            <a:r>
-              <a:rPr lang="en-US" sz="1300" b="1" dirty="0">
-                <a:solidFill>
-                  <a:srgbClr val="0F2A5F"/>
-                </a:solidFill>
-              </a:rPr>
-              <a:t>biodiversity</a:t>
-            </a:r>
-            <a:pPr indent="0" marL="0">
-              <a:spcAft>
-                <a:spcPts val="500"/>
-              </a:spcAft>
-              <a:buNone/>
-            </a:pPr>
-            <a:r>
-              <a:rPr lang="en-US" sz="1300" dirty="0">
-                <a:solidFill>
-                  <a:srgbClr val="141B26"/>
-                </a:solidFill>
-              </a:rPr>
-              <a:t>  the number of different species in an area or on Earth</a:t>
-            </a:r>
-            <a:endParaRPr lang="en-US" sz="1300" dirty="0"/>
-          </a:p>
-          <a:p>
-            <a:pPr indent="0" marL="0">
-              <a:spcAft>
-                <a:spcPts val="500"/>
-              </a:spcAft>
-              <a:buNone/>
-            </a:pPr>
-            <a:r>
-              <a:rPr lang="en-US" sz="1300" b="1" dirty="0">
-                <a:solidFill>
-                  <a:srgbClr val="0F2A5F"/>
-                </a:solidFill>
-              </a:rPr>
-              <a:t>nature reserve</a:t>
-            </a:r>
-            <a:pPr indent="0" marL="0">
-              <a:spcAft>
-                <a:spcPts val="500"/>
-              </a:spcAft>
-              <a:buNone/>
-            </a:pPr>
-            <a:r>
-              <a:rPr lang="en-US" sz="1300" dirty="0">
-                <a:solidFill>
-                  <a:srgbClr val="141B26"/>
-                </a:solidFill>
-              </a:rPr>
-              <a:t>  an area where habitats and species are protected</a:t>
-            </a:r>
-            <a:endParaRPr lang="en-US" sz="1300" dirty="0"/>
-          </a:p>
-          <a:p>
-            <a:pPr indent="0" marL="0">
-              <a:spcAft>
-                <a:spcPts val="500"/>
-              </a:spcAft>
-              <a:buNone/>
-            </a:pPr>
-            <a:r>
-              <a:rPr lang="en-US" sz="1300" b="1" dirty="0">
-                <a:solidFill>
-                  <a:srgbClr val="0F2A5F"/>
-                </a:solidFill>
-              </a:rPr>
-              <a:t>breeding programme</a:t>
-            </a:r>
-            <a:pPr indent="0" marL="0">
-              <a:spcAft>
-                <a:spcPts val="500"/>
-              </a:spcAft>
-              <a:buNone/>
-            </a:pPr>
-            <a:r>
-              <a:rPr lang="en-US" sz="1300" dirty="0">
-                <a:solidFill>
-                  <a:srgbClr val="141B26"/>
-                </a:solidFill>
-              </a:rPr>
-              <a:t>  breeding endangered animals or plants in captivity to increase their numbers</a:t>
-            </a:r>
-            <a:endParaRPr lang="en-US" sz="1300" dirty="0"/>
-          </a:p>
-          <a:p>
-            <a:pPr indent="0" marL="0">
-              <a:spcAft>
-                <a:spcPts val="500"/>
-              </a:spcAft>
-              <a:buNone/>
-            </a:pPr>
-            <a:r>
-              <a:rPr lang="en-US" sz="1300" b="1" dirty="0">
-                <a:solidFill>
-                  <a:srgbClr val="0F2A5F"/>
-                </a:solidFill>
-              </a:rPr>
-              <a:t>gene bank</a:t>
-            </a:r>
-            <a:pPr indent="0" marL="0">
-              <a:spcAft>
-                <a:spcPts val="500"/>
-              </a:spcAft>
-              <a:buNone/>
-            </a:pPr>
-            <a:r>
-              <a:rPr lang="en-US" sz="1300" dirty="0">
-                <a:solidFill>
-                  <a:srgbClr val="141B26"/>
-                </a:solidFill>
-              </a:rPr>
-              <a:t>  a store of seeds, gametes or cells kept cold so a species can be grown again</a:t>
-            </a:r>
-            <a:endParaRPr lang="en-US" sz="1300" dirty="0"/>
+              <a:buNone/>
+            </a:pPr>
+            <a:r>
+              <a:rPr lang="en-US" sz="1400" i="1" dirty="0">
+                <a:solidFill>
+                  <a:srgbClr val="5B6574"/>
+                </a:solidFill>
+              </a:rPr>
+              <a:t>Meanings are in the key words box on your worksheet.</a:t>
+            </a:r>
+            <a:endParaRPr lang="en-US" sz="1400" dirty="0"/>
           </a:p>
         </p:txBody>
       </p:sp>
@@ -5960,32 +5869,30 @@
         <p:spPr>
           <a:xfrm>
             <a:off x="548640" y="1371600"/>
-            <a:ext cx="5394960" cy="2377440"/>
-          </a:xfrm>
-          <a:prstGeom prst="rect">
-            <a:avLst/>
-          </a:prstGeom>
-          <a:noFill/>
-          <a:ln/>
-        </p:spPr>
-        <p:txBody>
-          <a:bodyPr wrap="square" lIns="0" tIns="0" rIns="0" bIns="0" rtlCol="0" anchor="t">
-            <a:normAutofit/>
-          </a:bodyPr>
+            <a:ext cx="5394960" cy="2651760"/>
+          </a:xfrm>
+          <a:prstGeom prst="rect">
+            <a:avLst/>
+          </a:prstGeom>
+          <a:noFill/>
+          <a:ln/>
+        </p:spPr>
+        <p:txBody>
+          <a:bodyPr wrap="square" lIns="0" tIns="0" rIns="0" bIns="0" rtlCol="0" anchor="t"/>
           <a:lstStyle/>
           <a:p>
             <a:pPr indent="0" marL="0">
               <a:buNone/>
             </a:pPr>
             <a:r>
-              <a:rPr lang="en-US" sz="2800" b="1" dirty="0">
+              <a:rPr lang="en-US" sz="2900" b="1" dirty="0">
                 <a:solidFill>
                   <a:srgbClr val="0F2A5F"/>
                 </a:solidFill>
               </a:rPr>
               <a:t>Thylacines were killed in Tasmania to protect sheep. The last one died in a zoo in 1936. Which environmental factor caused this extinction: abiotic or biotic?</a:t>
             </a:r>
-            <a:endParaRPr lang="en-US" sz="2800" dirty="0"/>
+            <a:endParaRPr lang="en-US" sz="2900" dirty="0"/>
           </a:p>
         </p:txBody>
       </p:sp>
@@ -5997,19 +5904,17 @@
         </p:nvSpPr>
         <p:spPr>
           <a:xfrm>
-            <a:off x="548640" y="3794760"/>
-            <a:ext cx="5394960" cy="2103120"/>
-          </a:xfrm>
-          <a:prstGeom prst="rect">
-            <a:avLst/>
-          </a:prstGeom>
-          <a:noFill/>
-          <a:ln/>
-        </p:spPr>
-        <p:txBody>
-          <a:bodyPr wrap="square" lIns="0" tIns="0" rIns="0" bIns="0" rtlCol="0" anchor="t">
-            <a:normAutofit/>
-          </a:bodyPr>
+            <a:off x="548640" y="4114800"/>
+            <a:ext cx="5394960" cy="1828800"/>
+          </a:xfrm>
+          <a:prstGeom prst="rect">
+            <a:avLst/>
+          </a:prstGeom>
+          <a:noFill/>
+          <a:ln/>
+        </p:spPr>
+        <p:txBody>
+          <a:bodyPr wrap="square" lIns="0" tIns="0" rIns="0" bIns="0" rtlCol="0" anchor="t"/>
           <a:lstStyle/>
           <a:p>
             <a:pPr indent="0" marL="0">
@@ -6019,14 +5924,14 @@
               <a:buNone/>
             </a:pPr>
             <a:r>
-              <a:rPr lang="en-US" sz="1600" dirty="0">
+              <a:rPr lang="en-US" sz="2000" dirty="0">
                 <a:solidFill>
                   <a:srgbClr val="141B26"/>
                 </a:solidFill>
               </a:rPr>
               <a:t>Talk to a partner: name two other human activities that can make a species extinct.</a:t>
             </a:r>
-            <a:endParaRPr lang="en-US" sz="1600" dirty="0"/>
+            <a:endParaRPr lang="en-US" sz="2000" dirty="0"/>
           </a:p>
         </p:txBody>
       </p:sp>
@@ -6063,7 +5968,7 @@
         <p:spPr>
           <a:xfrm>
             <a:off x="6309360" y="5196209"/>
-            <a:ext cx="5303520" cy="502920"/>
+            <a:ext cx="5303520" cy="548640"/>
           </a:xfrm>
           <a:prstGeom prst="rect">
             <a:avLst/>
@@ -6079,7 +5984,7 @@
               <a:buNone/>
             </a:pPr>
             <a:r>
-              <a:rPr lang="en-US" sz="1100" dirty="0">
+              <a:rPr lang="en-US" sz="1300" dirty="0">
                 <a:solidFill>
                   <a:srgbClr val="141B26"/>
                 </a:solidFill>
@@ -6089,21 +5994,21 @@
             <a:pPr algn="l" indent="0" marL="0">
               <a:buNone/>
             </a:pPr>
-            <a:endParaRPr lang="en-US" sz="1100" dirty="0"/>
+            <a:endParaRPr lang="en-US" sz="1300" dirty="0"/>
           </a:p>
           <a:p>
             <a:pPr algn="l" indent="0" marL="0">
               <a:buNone/>
             </a:pPr>
             <a:r>
-              <a:rPr lang="en-US" sz="800" dirty="0">
+              <a:rPr lang="en-US" sz="900" dirty="0">
                 <a:solidFill>
                   <a:srgbClr val="5B6574"/>
                 </a:solidFill>
               </a:rPr>
               <a:t>Image: Photographer: Rodney Start, CC BY 4.0, via Wikimedia Commons</a:t>
             </a:r>
-            <a:endParaRPr lang="en-US" sz="1100" dirty="0"/>
+            <a:endParaRPr lang="en-US" sz="1300" dirty="0"/>
           </a:p>
         </p:txBody>
       </p:sp>
@@ -6286,8 +6191,8 @@
         </p:nvSpPr>
         <p:spPr>
           <a:xfrm>
-            <a:off x="548640" y="6053328"/>
-            <a:ext cx="9601200" cy="292608"/>
+            <a:off x="548640" y="6035040"/>
+            <a:ext cx="9601200" cy="310896"/>
           </a:xfrm>
           <a:prstGeom prst="rect">
             <a:avLst/>
@@ -6303,7 +6208,7 @@
               <a:buNone/>
             </a:pPr>
             <a:r>
-              <a:rPr lang="en-US" sz="1200" b="1" dirty="0">
+              <a:rPr lang="en-US" sz="1400" b="1" dirty="0">
                 <a:solidFill>
                   <a:srgbClr val="7B3A8E"/>
                 </a:solidFill>
@@ -6314,14 +6219,14 @@
               <a:buNone/>
             </a:pPr>
             <a:r>
-              <a:rPr lang="en-US" sz="1200" dirty="0">
+              <a:rPr lang="en-US" sz="1400" dirty="0">
                 <a:solidFill>
                   <a:srgbClr val="7B3A8E"/>
                 </a:solidFill>
               </a:rPr>
               <a:t>adaptation   ·   endangered   ·   extinct</a:t>
             </a:r>
-            <a:endParaRPr lang="en-US" sz="1200" dirty="0"/>
+            <a:endParaRPr lang="en-US" sz="1400" dirty="0"/>
           </a:p>
         </p:txBody>
       </p:sp>
@@ -6343,81 +6248,79 @@
           <a:ln/>
         </p:spPr>
         <p:txBody>
-          <a:bodyPr wrap="square" lIns="0" tIns="0" rIns="0" bIns="0" rtlCol="0" anchor="t">
-            <a:normAutofit/>
-          </a:bodyPr>
-          <a:lstStyle/>
-          <a:p>
-            <a:pPr marL="228600" indent="-228600">
+          <a:bodyPr wrap="square" lIns="0" tIns="0" rIns="0" bIns="0" rtlCol="0" anchor="t"/>
+          <a:lstStyle/>
+          <a:p>
+            <a:pPr marL="304800" indent="-304800">
               <a:spcAft>
-                <a:spcPts val="600"/>
+                <a:spcPts val="800"/>
               </a:spcAft>
               <a:buSzPct val="100000"/>
               <a:buChar char="•"/>
             </a:pPr>
             <a:r>
-              <a:rPr lang="en-US" sz="1700" dirty="0">
+              <a:rPr lang="en-US" sz="2000" dirty="0">
                 <a:solidFill>
                   <a:srgbClr val="141B26"/>
                 </a:solidFill>
               </a:rPr>
               <a:t>The adaptations of an organism are due to its genes.</a:t>
             </a:r>
-            <a:endParaRPr lang="en-US" sz="1700" dirty="0"/>
-          </a:p>
-          <a:p>
-            <a:pPr marL="228600" indent="-228600">
+            <a:endParaRPr lang="en-US" sz="2000" dirty="0"/>
+          </a:p>
+          <a:p>
+            <a:pPr marL="304800" indent="-304800">
               <a:spcAft>
-                <a:spcPts val="600"/>
+                <a:spcPts val="800"/>
               </a:spcAft>
               <a:buSzPct val="100000"/>
               <a:buChar char="•"/>
             </a:pPr>
             <a:r>
-              <a:rPr lang="en-US" sz="1700" dirty="0">
+              <a:rPr lang="en-US" sz="2000" dirty="0">
                 <a:solidFill>
                   <a:srgbClr val="141B26"/>
                 </a:solidFill>
               </a:rPr>
               <a:t>If the ecosystem changes, a species may no longer be well adapted to the new conditions.</a:t>
             </a:r>
-            <a:endParaRPr lang="en-US" sz="1700" dirty="0"/>
-          </a:p>
-          <a:p>
-            <a:pPr marL="228600" indent="-228600">
+            <a:endParaRPr lang="en-US" sz="2000" dirty="0"/>
+          </a:p>
+          <a:p>
+            <a:pPr marL="304800" indent="-304800">
               <a:spcAft>
-                <a:spcPts val="600"/>
+                <a:spcPts val="800"/>
               </a:spcAft>
               <a:buSzPct val="100000"/>
               <a:buChar char="•"/>
             </a:pPr>
             <a:r>
-              <a:rPr lang="en-US" sz="1700" dirty="0">
+              <a:rPr lang="en-US" sz="2000" dirty="0">
                 <a:solidFill>
                   <a:srgbClr val="141B26"/>
                 </a:solidFill>
               </a:rPr>
               <a:t>Its numbers fall: it becomes endangered, and may become extinct.</a:t>
             </a:r>
-            <a:endParaRPr lang="en-US" sz="1700" dirty="0"/>
-          </a:p>
-          <a:p>
-            <a:pPr marL="228600" indent="-228600">
+            <a:endParaRPr lang="en-US" sz="2000" dirty="0"/>
+          </a:p>
+          <a:p>
+            <a:pPr marL="304800" indent="-304800">
               <a:spcAft>
-                <a:spcPts val="600"/>
+                <a:spcPts val="800"/>
               </a:spcAft>
               <a:buSzPct val="100000"/>
               <a:buChar char="•"/>
             </a:pPr>
             <a:r>
-              <a:rPr lang="en-US" sz="1700" dirty="0">
+              <a:rPr lang="en-US" sz="2000" dirty="0">
                 <a:solidFill>
                   <a:srgbClr val="141B26"/>
                 </a:solidFill>
               </a:rPr>
               <a:t>Changes in abiotic factors: rainfall, temperature, light. Changes in biotic factors: competition, disease, human activities (hunting, clearing habitats, poisons).</a:t>
             </a:r>
-            <a:endParaRPr lang="en-US" sz="1700" dirty="0"/>
+            <a:endParaRPr lang="en-US" sz="2000" dirty="0"/>
           </a:p>
         </p:txBody>
       </p:sp>
@@ -6454,7 +6357,7 @@
         <p:spPr>
           <a:xfrm>
             <a:off x="6583680" y="4944859"/>
-            <a:ext cx="5029200" cy="502920"/>
+            <a:ext cx="5029200" cy="548640"/>
           </a:xfrm>
           <a:prstGeom prst="rect">
             <a:avLst/>
@@ -6470,7 +6373,7 @@
               <a:buNone/>
             </a:pPr>
             <a:r>
-              <a:rPr lang="en-US" sz="1100" dirty="0">
+              <a:rPr lang="en-US" sz="1300" dirty="0">
                 <a:solidFill>
                   <a:srgbClr val="141B26"/>
                 </a:solidFill>
@@ -6480,21 +6383,21 @@
             <a:pPr algn="l" indent="0" marL="0">
               <a:buNone/>
             </a:pPr>
-            <a:endParaRPr lang="en-US" sz="1100" dirty="0"/>
+            <a:endParaRPr lang="en-US" sz="1300" dirty="0"/>
           </a:p>
           <a:p>
             <a:pPr algn="l" indent="0" marL="0">
               <a:buNone/>
             </a:pPr>
             <a:r>
-              <a:rPr lang="en-US" sz="800" dirty="0">
+              <a:rPr lang="en-US" sz="900" dirty="0">
                 <a:solidFill>
                   <a:srgbClr val="5B6574"/>
                 </a:solidFill>
               </a:rPr>
               <a:t>Image: charlieishere@btinternet.com, CC BY 2.0, via Wikimedia Commons</a:t>
             </a:r>
-            <a:endParaRPr lang="en-US" sz="1100" dirty="0"/>
+            <a:endParaRPr lang="en-US" sz="1300" dirty="0"/>
           </a:p>
         </p:txBody>
       </p:sp>
@@ -6541,16 +6444,14 @@
           <a:ln/>
         </p:spPr>
         <p:txBody>
-          <a:bodyPr wrap="square" lIns="0" tIns="0" rIns="0" bIns="0" rtlCol="0" anchor="ctr">
-            <a:normAutofit/>
-          </a:bodyPr>
+          <a:bodyPr wrap="square" lIns="0" tIns="0" rIns="0" bIns="0" rtlCol="0" anchor="ctr"/>
           <a:lstStyle/>
           <a:p>
             <a:pPr indent="0" marL="0">
               <a:buNone/>
             </a:pPr>
             <a:r>
-              <a:rPr lang="en-US" sz="1400" b="1" dirty="0">
+              <a:rPr lang="en-US" sz="1700" b="1" dirty="0">
                 <a:solidFill>
                   <a:srgbClr val="7B3A8E"/>
                 </a:solidFill>
@@ -6561,14 +6462,14 @@
               <a:buNone/>
             </a:pPr>
             <a:r>
-              <a:rPr lang="en-US" sz="1400" dirty="0">
+              <a:rPr lang="en-US" sz="1700" dirty="0">
                 <a:solidFill>
                   <a:srgbClr val="141B26"/>
                 </a:solidFill>
               </a:rPr>
               <a:t>A species cannot change its genes to fit a new environment; if it is no longer well adapted, it declines.</a:t>
             </a:r>
-            <a:endParaRPr lang="en-US" sz="1400" dirty="0"/>
+            <a:endParaRPr lang="en-US" sz="1700" dirty="0"/>
           </a:p>
         </p:txBody>
       </p:sp>
@@ -6751,8 +6652,8 @@
         </p:nvSpPr>
         <p:spPr>
           <a:xfrm>
-            <a:off x="548640" y="6053328"/>
-            <a:ext cx="9601200" cy="292608"/>
+            <a:off x="548640" y="6035040"/>
+            <a:ext cx="9601200" cy="310896"/>
           </a:xfrm>
           <a:prstGeom prst="rect">
             <a:avLst/>
@@ -6768,7 +6669,7 @@
               <a:buNone/>
             </a:pPr>
             <a:r>
-              <a:rPr lang="en-US" sz="1200" b="1" dirty="0">
+              <a:rPr lang="en-US" sz="1400" b="1" dirty="0">
                 <a:solidFill>
                   <a:srgbClr val="7B3A8E"/>
                 </a:solidFill>
@@ -6779,14 +6680,14 @@
               <a:buNone/>
             </a:pPr>
             <a:r>
-              <a:rPr lang="en-US" sz="1200" dirty="0">
+              <a:rPr lang="en-US" sz="1400" dirty="0">
                 <a:solidFill>
                   <a:srgbClr val="7B3A8E"/>
                 </a:solidFill>
               </a:rPr>
               <a:t>competition   ·   native species   ·   biotic factor</a:t>
             </a:r>
-            <a:endParaRPr lang="en-US" sz="1200" dirty="0"/>
+            <a:endParaRPr lang="en-US" sz="1400" dirty="0"/>
           </a:p>
         </p:txBody>
       </p:sp>
@@ -6808,81 +6709,79 @@
           <a:ln/>
         </p:spPr>
         <p:txBody>
-          <a:bodyPr wrap="square" lIns="0" tIns="0" rIns="0" bIns="0" rtlCol="0" anchor="t">
-            <a:normAutofit/>
-          </a:bodyPr>
-          <a:lstStyle/>
-          <a:p>
-            <a:pPr marL="228600" indent="-228600">
+          <a:bodyPr wrap="square" lIns="0" tIns="0" rIns="0" bIns="0" rtlCol="0" anchor="t"/>
+          <a:lstStyle/>
+          <a:p>
+            <a:pPr marL="304800" indent="-304800">
               <a:spcAft>
-                <a:spcPts val="600"/>
+                <a:spcPts val="800"/>
               </a:spcAft>
               <a:buSzPct val="100000"/>
               <a:buChar char="•"/>
             </a:pPr>
             <a:r>
-              <a:rPr lang="en-US" sz="1700" dirty="0">
+              <a:rPr lang="en-US" sz="2000" dirty="0">
                 <a:solidFill>
                   <a:srgbClr val="141B26"/>
                 </a:solidFill>
               </a:rPr>
               <a:t>Red squirrels are native to the UK. Greys were brought from the USA in the 1870s; now reds are rare.</a:t>
             </a:r>
-            <a:endParaRPr lang="en-US" sz="1700" dirty="0"/>
-          </a:p>
-          <a:p>
-            <a:pPr marL="228600" indent="-228600">
+            <a:endParaRPr lang="en-US" sz="2000" dirty="0"/>
+          </a:p>
+          <a:p>
+            <a:pPr marL="304800" indent="-304800">
               <a:spcAft>
-                <a:spcPts val="600"/>
+                <a:spcPts val="800"/>
               </a:spcAft>
               <a:buSzPct val="100000"/>
               <a:buChar char="•"/>
             </a:pPr>
             <a:r>
-              <a:rPr lang="en-US" sz="1700" dirty="0">
+              <a:rPr lang="en-US" sz="2000" dirty="0">
                 <a:solidFill>
                   <a:srgbClr val="141B26"/>
                 </a:solidFill>
               </a:rPr>
               <a:t>Greys store more body fat, so more survive a long winter.</a:t>
             </a:r>
-            <a:endParaRPr lang="en-US" sz="1700" dirty="0"/>
-          </a:p>
-          <a:p>
-            <a:pPr marL="228600" indent="-228600">
+            <a:endParaRPr lang="en-US" sz="2000" dirty="0"/>
+          </a:p>
+          <a:p>
+            <a:pPr marL="304800" indent="-304800">
               <a:spcAft>
-                <a:spcPts val="600"/>
+                <a:spcPts val="800"/>
               </a:spcAft>
               <a:buSzPct val="100000"/>
               <a:buChar char="•"/>
             </a:pPr>
             <a:r>
-              <a:rPr lang="en-US" sz="1700" dirty="0">
+              <a:rPr lang="en-US" sz="2000" dirty="0">
                 <a:solidFill>
                   <a:srgbClr val="141B26"/>
                 </a:solidFill>
               </a:rPr>
               <a:t>Greys can digest unripe acorns; reds cannot. Greys eat the acorns first, so reds get less food.</a:t>
             </a:r>
-            <a:endParaRPr lang="en-US" sz="1700" dirty="0"/>
-          </a:p>
-          <a:p>
-            <a:pPr marL="228600" indent="-228600">
+            <a:endParaRPr lang="en-US" sz="2000" dirty="0"/>
+          </a:p>
+          <a:p>
+            <a:pPr marL="304800" indent="-304800">
               <a:spcAft>
-                <a:spcPts val="600"/>
+                <a:spcPts val="800"/>
               </a:spcAft>
               <a:buSzPct val="100000"/>
               <a:buChar char="•"/>
             </a:pPr>
             <a:r>
-              <a:rPr lang="en-US" sz="1700" dirty="0">
+              <a:rPr lang="en-US" sz="2000" dirty="0">
                 <a:solidFill>
                   <a:srgbClr val="141B26"/>
                 </a:solidFill>
               </a:rPr>
               <a:t>Greys carry squirrel pox, which does not harm greys but kills reds.</a:t>
             </a:r>
-            <a:endParaRPr lang="en-US" sz="1700" dirty="0"/>
+            <a:endParaRPr lang="en-US" sz="2000" dirty="0"/>
           </a:p>
         </p:txBody>
       </p:sp>
@@ -6919,7 +6818,7 @@
         <p:spPr>
           <a:xfrm>
             <a:off x="6583680" y="4834354"/>
-            <a:ext cx="5029200" cy="502920"/>
+            <a:ext cx="5029200" cy="548640"/>
           </a:xfrm>
           <a:prstGeom prst="rect">
             <a:avLst/>
@@ -6935,7 +6834,7 @@
               <a:buNone/>
             </a:pPr>
             <a:r>
-              <a:rPr lang="en-US" sz="1100" dirty="0">
+              <a:rPr lang="en-US" sz="1300" dirty="0">
                 <a:solidFill>
                   <a:srgbClr val="141B26"/>
                 </a:solidFill>
@@ -6945,21 +6844,21 @@
             <a:pPr algn="l" indent="0" marL="0">
               <a:buNone/>
             </a:pPr>
-            <a:endParaRPr lang="en-US" sz="1100" dirty="0"/>
+            <a:endParaRPr lang="en-US" sz="1300" dirty="0"/>
           </a:p>
           <a:p>
             <a:pPr algn="l" indent="0" marL="0">
               <a:buNone/>
             </a:pPr>
             <a:r>
-              <a:rPr lang="en-US" sz="800" dirty="0">
+              <a:rPr lang="en-US" sz="900" dirty="0">
                 <a:solidFill>
                   <a:srgbClr val="5B6574"/>
                 </a:solidFill>
               </a:rPr>
               <a:t>Image: pete. #hwcp, CC BY 2.0, via Wikimedia Commons</a:t>
             </a:r>
-            <a:endParaRPr lang="en-US" sz="1100" dirty="0"/>
+            <a:endParaRPr lang="en-US" sz="1300" dirty="0"/>
           </a:p>
         </p:txBody>
       </p:sp>
@@ -7006,16 +6905,14 @@
           <a:ln/>
         </p:spPr>
         <p:txBody>
-          <a:bodyPr wrap="square" lIns="0" tIns="0" rIns="0" bIns="0" rtlCol="0" anchor="ctr">
-            <a:normAutofit/>
-          </a:bodyPr>
+          <a:bodyPr wrap="square" lIns="0" tIns="0" rIns="0" bIns="0" rtlCol="0" anchor="ctr"/>
           <a:lstStyle/>
           <a:p>
             <a:pPr indent="0" marL="0">
               <a:buNone/>
             </a:pPr>
             <a:r>
-              <a:rPr lang="en-US" sz="1400" b="1" dirty="0">
+              <a:rPr lang="en-US" sz="1700" b="1" dirty="0">
                 <a:solidFill>
                   <a:srgbClr val="7B3A8E"/>
                 </a:solidFill>
@@ -7026,14 +6923,14 @@
               <a:buNone/>
             </a:pPr>
             <a:r>
-              <a:rPr lang="en-US" sz="1400" dirty="0">
+              <a:rPr lang="en-US" sz="1700" dirty="0">
                 <a:solidFill>
                   <a:srgbClr val="141B26"/>
                 </a:solidFill>
               </a:rPr>
               <a:t>When food is limited, the better adapted competitor survives and reproduces more, and its population grows faster.</a:t>
             </a:r>
-            <a:endParaRPr lang="en-US" sz="1400" dirty="0"/>
+            <a:endParaRPr lang="en-US" sz="1700" dirty="0"/>
           </a:p>
         </p:txBody>
       </p:sp>
@@ -7216,8 +7113,8 @@
         </p:nvSpPr>
         <p:spPr>
           <a:xfrm>
-            <a:off x="548640" y="6053328"/>
-            <a:ext cx="9601200" cy="292608"/>
+            <a:off x="548640" y="6035040"/>
+            <a:ext cx="9601200" cy="310896"/>
           </a:xfrm>
           <a:prstGeom prst="rect">
             <a:avLst/>
@@ -7233,7 +7130,7 @@
               <a:buNone/>
             </a:pPr>
             <a:r>
-              <a:rPr lang="en-US" sz="1200" b="1" dirty="0">
+              <a:rPr lang="en-US" sz="1400" b="1" dirty="0">
                 <a:solidFill>
                   <a:srgbClr val="7B3A8E"/>
                 </a:solidFill>
@@ -7244,14 +7141,14 @@
               <a:buNone/>
             </a:pPr>
             <a:r>
-              <a:rPr lang="en-US" sz="1200" dirty="0">
+              <a:rPr lang="en-US" sz="1400" dirty="0">
                 <a:solidFill>
                   <a:srgbClr val="7B3A8E"/>
                 </a:solidFill>
               </a:rPr>
               <a:t>adaptation   ·   competition</a:t>
             </a:r>
-            <a:endParaRPr lang="en-US" sz="1200" dirty="0"/>
+            <a:endParaRPr lang="en-US" sz="1400" dirty="0"/>
           </a:p>
         </p:txBody>
       </p:sp>
@@ -7307,14 +7204,14 @@
               <a:buNone/>
             </a:pPr>
             <a:r>
-              <a:rPr lang="en-US" sz="2000" b="1" dirty="0">
+              <a:rPr lang="en-US" sz="2200" b="1" dirty="0">
                 <a:solidFill>
                   <a:srgbClr val="0F2A5F"/>
                 </a:solidFill>
               </a:rPr>
               <a:t>Both species</a:t>
             </a:r>
-            <a:endParaRPr lang="en-US" sz="2000" dirty="0"/>
+            <a:endParaRPr lang="en-US" sz="2200" dirty="0"/>
           </a:p>
         </p:txBody>
       </p:sp>
@@ -7336,81 +7233,79 @@
           <a:ln/>
         </p:spPr>
         <p:txBody>
-          <a:bodyPr wrap="square" lIns="0" tIns="0" rIns="0" bIns="0" rtlCol="0" anchor="t">
-            <a:normAutofit/>
-          </a:bodyPr>
-          <a:lstStyle/>
-          <a:p>
-            <a:pPr marL="228600" indent="-228600">
+          <a:bodyPr wrap="square" lIns="0" tIns="0" rIns="0" bIns="0" rtlCol="0" anchor="t"/>
+          <a:lstStyle/>
+          <a:p>
+            <a:pPr marL="304800" indent="-304800">
               <a:spcAft>
-                <a:spcPts val="600"/>
+                <a:spcPts val="800"/>
               </a:spcAft>
               <a:buSzPct val="100000"/>
               <a:buChar char="•"/>
             </a:pPr>
             <a:r>
-              <a:rPr lang="en-US" sz="1500" dirty="0">
+              <a:rPr lang="en-US" sz="1800" dirty="0">
                 <a:solidFill>
                   <a:srgbClr val="141B26"/>
                 </a:solidFill>
               </a:rPr>
               <a:t>Eyes on the side of the head: all-round vision to spot predators.</a:t>
             </a:r>
-            <a:endParaRPr lang="en-US" sz="1500" dirty="0"/>
-          </a:p>
-          <a:p>
-            <a:pPr marL="228600" indent="-228600">
+            <a:endParaRPr lang="en-US" sz="1800" dirty="0"/>
+          </a:p>
+          <a:p>
+            <a:pPr marL="304800" indent="-304800">
               <a:spcAft>
-                <a:spcPts val="600"/>
+                <a:spcPts val="800"/>
               </a:spcAft>
               <a:buSzPct val="100000"/>
               <a:buChar char="•"/>
             </a:pPr>
             <a:r>
-              <a:rPr lang="en-US" sz="1500" dirty="0">
+              <a:rPr lang="en-US" sz="1800" dirty="0">
                 <a:solidFill>
                   <a:srgbClr val="141B26"/>
                 </a:solidFill>
               </a:rPr>
               <a:t>Long, bushy tail for balance.</a:t>
             </a:r>
-            <a:endParaRPr lang="en-US" sz="1500" dirty="0"/>
-          </a:p>
-          <a:p>
-            <a:pPr marL="228600" indent="-228600">
+            <a:endParaRPr lang="en-US" sz="1800" dirty="0"/>
+          </a:p>
+          <a:p>
+            <a:pPr marL="304800" indent="-304800">
               <a:spcAft>
-                <a:spcPts val="600"/>
+                <a:spcPts val="800"/>
               </a:spcAft>
               <a:buSzPct val="100000"/>
               <a:buChar char="•"/>
             </a:pPr>
             <a:r>
-              <a:rPr lang="en-US" sz="1500" dirty="0">
+              <a:rPr lang="en-US" sz="1800" dirty="0">
                 <a:solidFill>
                   <a:srgbClr val="141B26"/>
                 </a:solidFill>
               </a:rPr>
               <a:t>Long, strong hind legs for leaping.</a:t>
             </a:r>
-            <a:endParaRPr lang="en-US" sz="1500" dirty="0"/>
-          </a:p>
-          <a:p>
-            <a:pPr marL="228600" indent="-228600">
+            <a:endParaRPr lang="en-US" sz="1800" dirty="0"/>
+          </a:p>
+          <a:p>
+            <a:pPr marL="304800" indent="-304800">
               <a:spcAft>
-                <a:spcPts val="600"/>
+                <a:spcPts val="800"/>
               </a:spcAft>
               <a:buSzPct val="100000"/>
               <a:buChar char="•"/>
             </a:pPr>
             <a:r>
-              <a:rPr lang="en-US" sz="1500" dirty="0">
+              <a:rPr lang="en-US" sz="1800" dirty="0">
                 <a:solidFill>
                   <a:srgbClr val="141B26"/>
                 </a:solidFill>
               </a:rPr>
               <a:t>Sharp claws for gripping tree trunks.</a:t>
             </a:r>
-            <a:endParaRPr lang="en-US" sz="1500" dirty="0"/>
+            <a:endParaRPr lang="en-US" sz="1800" dirty="0"/>
           </a:p>
         </p:txBody>
       </p:sp>
@@ -7466,14 +7361,14 @@
               <a:buNone/>
             </a:pPr>
             <a:r>
-              <a:rPr lang="en-US" sz="2000" b="1" dirty="0">
+              <a:rPr lang="en-US" sz="2200" b="1" dirty="0">
                 <a:solidFill>
                   <a:srgbClr val="0F2A5F"/>
                 </a:solidFill>
               </a:rPr>
               <a:t>Differences</a:t>
             </a:r>
-            <a:endParaRPr lang="en-US" sz="2000" dirty="0"/>
+            <a:endParaRPr lang="en-US" sz="2200" dirty="0"/>
           </a:p>
         </p:txBody>
       </p:sp>
@@ -7495,81 +7390,79 @@
           <a:ln/>
         </p:spPr>
         <p:txBody>
-          <a:bodyPr wrap="square" lIns="0" tIns="0" rIns="0" bIns="0" rtlCol="0" anchor="t">
-            <a:normAutofit/>
-          </a:bodyPr>
-          <a:lstStyle/>
-          <a:p>
-            <a:pPr marL="228600" indent="-228600">
+          <a:bodyPr wrap="square" lIns="0" tIns="0" rIns="0" bIns="0" rtlCol="0" anchor="t"/>
+          <a:lstStyle/>
+          <a:p>
+            <a:pPr marL="304800" indent="-304800">
               <a:spcAft>
-                <a:spcPts val="600"/>
+                <a:spcPts val="800"/>
               </a:spcAft>
               <a:buSzPct val="100000"/>
               <a:buChar char="•"/>
             </a:pPr>
             <a:r>
-              <a:rPr lang="en-US" sz="1500" dirty="0">
+              <a:rPr lang="en-US" sz="1800" dirty="0">
                 <a:solidFill>
                   <a:srgbClr val="141B26"/>
                 </a:solidFill>
               </a:rPr>
               <a:t>Greys are bigger and store more fat: better in long winters.</a:t>
             </a:r>
-            <a:endParaRPr lang="en-US" sz="1500" dirty="0"/>
-          </a:p>
-          <a:p>
-            <a:pPr marL="228600" indent="-228600">
+            <a:endParaRPr lang="en-US" sz="1800" dirty="0"/>
+          </a:p>
+          <a:p>
+            <a:pPr marL="304800" indent="-304800">
               <a:spcAft>
-                <a:spcPts val="600"/>
+                <a:spcPts val="800"/>
               </a:spcAft>
               <a:buSzPct val="100000"/>
               <a:buChar char="•"/>
             </a:pPr>
             <a:r>
-              <a:rPr lang="en-US" sz="1500" dirty="0">
+              <a:rPr lang="en-US" sz="1800" dirty="0">
                 <a:solidFill>
                   <a:srgbClr val="141B26"/>
                 </a:solidFill>
               </a:rPr>
               <a:t>Greys digest unripe acorns: eat them before the reds.</a:t>
             </a:r>
-            <a:endParaRPr lang="en-US" sz="1500" dirty="0"/>
-          </a:p>
-          <a:p>
-            <a:pPr marL="228600" indent="-228600">
+            <a:endParaRPr lang="en-US" sz="1800" dirty="0"/>
+          </a:p>
+          <a:p>
+            <a:pPr marL="304800" indent="-304800">
               <a:spcAft>
-                <a:spcPts val="600"/>
+                <a:spcPts val="800"/>
               </a:spcAft>
               <a:buSzPct val="100000"/>
               <a:buChar char="•"/>
             </a:pPr>
             <a:r>
-              <a:rPr lang="en-US" sz="1500" dirty="0">
+              <a:rPr lang="en-US" sz="1800" dirty="0">
                 <a:solidFill>
                   <a:srgbClr val="141B26"/>
                 </a:solidFill>
               </a:rPr>
               <a:t>Greys carry squirrel pox, which kills reds.</a:t>
             </a:r>
-            <a:endParaRPr lang="en-US" sz="1500" dirty="0"/>
-          </a:p>
-          <a:p>
-            <a:pPr marL="228600" indent="-228600">
+            <a:endParaRPr lang="en-US" sz="1800" dirty="0"/>
+          </a:p>
+          <a:p>
+            <a:pPr marL="304800" indent="-304800">
               <a:spcAft>
-                <a:spcPts val="600"/>
+                <a:spcPts val="800"/>
               </a:spcAft>
               <a:buSzPct val="100000"/>
               <a:buChar char="•"/>
             </a:pPr>
             <a:r>
-              <a:rPr lang="en-US" sz="1500" dirty="0">
+              <a:rPr lang="en-US" sz="1800" dirty="0">
                 <a:solidFill>
                   <a:srgbClr val="141B26"/>
                 </a:solidFill>
               </a:rPr>
               <a:t>Reds are lighter: better on thin, flexible conifer branches, and eat small conifer seeds.</a:t>
             </a:r>
-            <a:endParaRPr lang="en-US" sz="1500" dirty="0"/>
+            <a:endParaRPr lang="en-US" sz="1800" dirty="0"/>
           </a:p>
         </p:txBody>
       </p:sp>
@@ -7616,16 +7509,14 @@
           <a:ln/>
         </p:spPr>
         <p:txBody>
-          <a:bodyPr wrap="square" lIns="0" tIns="0" rIns="0" bIns="0" rtlCol="0" anchor="ctr">
-            <a:normAutofit/>
-          </a:bodyPr>
+          <a:bodyPr wrap="square" lIns="0" tIns="0" rIns="0" bIns="0" rtlCol="0" anchor="ctr"/>
           <a:lstStyle/>
           <a:p>
             <a:pPr indent="0" marL="0">
               <a:buNone/>
             </a:pPr>
             <a:r>
-              <a:rPr lang="en-US" sz="1400" b="1" dirty="0">
+              <a:rPr lang="en-US" sz="1700" b="1" dirty="0">
                 <a:solidFill>
                   <a:srgbClr val="7B3A8E"/>
                 </a:solidFill>
@@ -7636,14 +7527,14 @@
               <a:buNone/>
             </a:pPr>
             <a:r>
-              <a:rPr lang="en-US" sz="1400" dirty="0">
+              <a:rPr lang="en-US" sz="1700" dirty="0">
                 <a:solidFill>
                   <a:srgbClr val="141B26"/>
                 </a:solidFill>
               </a:rPr>
               <a:t>Which species is 'better adapted' depends on the habitat: reds still do well in conifer forests.</a:t>
             </a:r>
-            <a:endParaRPr lang="en-US" sz="1400" dirty="0"/>
+            <a:endParaRPr lang="en-US" sz="1700" dirty="0"/>
           </a:p>
         </p:txBody>
       </p:sp>
@@ -7826,8 +7717,8 @@
         </p:nvSpPr>
         <p:spPr>
           <a:xfrm>
-            <a:off x="548640" y="6053328"/>
-            <a:ext cx="9601200" cy="292608"/>
+            <a:off x="548640" y="6035040"/>
+            <a:ext cx="9601200" cy="310896"/>
           </a:xfrm>
           <a:prstGeom prst="rect">
             <a:avLst/>
@@ -7843,7 +7734,7 @@
               <a:buNone/>
             </a:pPr>
             <a:r>
-              <a:rPr lang="en-US" sz="1200" b="1" dirty="0">
+              <a:rPr lang="en-US" sz="1400" b="1" dirty="0">
                 <a:solidFill>
                   <a:srgbClr val="7B3A8E"/>
                 </a:solidFill>
@@ -7854,14 +7745,14 @@
               <a:buNone/>
             </a:pPr>
             <a:r>
-              <a:rPr lang="en-US" sz="1200" dirty="0">
+              <a:rPr lang="en-US" sz="1400" dirty="0">
                 <a:solidFill>
                   <a:srgbClr val="7B3A8E"/>
                 </a:solidFill>
               </a:rPr>
               <a:t>biodiversity   ·   nature reserve   ·   breeding programme   ·   gene bank</a:t>
             </a:r>
-            <a:endParaRPr lang="en-US" sz="1200" dirty="0"/>
+            <a:endParaRPr lang="en-US" sz="1400" dirty="0"/>
           </a:p>
         </p:txBody>
       </p:sp>
@@ -7883,81 +7774,79 @@
           <a:ln/>
         </p:spPr>
         <p:txBody>
-          <a:bodyPr wrap="square" lIns="0" tIns="0" rIns="0" bIns="0" rtlCol="0" anchor="t">
-            <a:normAutofit/>
-          </a:bodyPr>
-          <a:lstStyle/>
-          <a:p>
-            <a:pPr marL="228600" indent="-228600">
+          <a:bodyPr wrap="square" lIns="0" tIns="0" rIns="0" bIns="0" rtlCol="0" anchor="t"/>
+          <a:lstStyle/>
+          <a:p>
+            <a:pPr marL="304800" indent="-304800">
               <a:spcAft>
-                <a:spcPts val="600"/>
+                <a:spcPts val="800"/>
               </a:spcAft>
               <a:buSzPct val="100000"/>
               <a:buChar char="•"/>
             </a:pPr>
             <a:r>
-              <a:rPr lang="en-US" sz="1700" dirty="0">
+              <a:rPr lang="en-US" sz="1900" dirty="0">
                 <a:solidFill>
                   <a:srgbClr val="141B26"/>
                 </a:solidFill>
               </a:rPr>
               <a:t>Biodiversity is the number of different species.</a:t>
             </a:r>
-            <a:endParaRPr lang="en-US" sz="1700" dirty="0"/>
-          </a:p>
-          <a:p>
-            <a:pPr marL="228600" indent="-228600">
+            <a:endParaRPr lang="en-US" sz="1900" dirty="0"/>
+          </a:p>
+          <a:p>
+            <a:pPr marL="304800" indent="-304800">
               <a:spcAft>
-                <a:spcPts val="600"/>
+                <a:spcPts val="800"/>
               </a:spcAft>
               <a:buSzPct val="100000"/>
               <a:buChar char="•"/>
             </a:pPr>
             <a:r>
-              <a:rPr lang="en-US" sz="1700" dirty="0">
+              <a:rPr lang="en-US" sz="1900" dirty="0">
                 <a:solidFill>
                   <a:srgbClr val="141B26"/>
                 </a:solidFill>
               </a:rPr>
               <a:t>Extinctions upset ecosystems and food webs, and we lose species we could use (food, medicines).</a:t>
             </a:r>
-            <a:endParaRPr lang="en-US" sz="1700" dirty="0"/>
-          </a:p>
-          <a:p>
-            <a:pPr marL="228600" indent="-228600">
+            <a:endParaRPr lang="en-US" sz="1900" dirty="0"/>
+          </a:p>
+          <a:p>
+            <a:pPr marL="304800" indent="-304800">
               <a:spcAft>
-                <a:spcPts val="600"/>
+                <a:spcPts val="800"/>
               </a:spcAft>
               <a:buSzPct val="100000"/>
               <a:buChar char="•"/>
             </a:pPr>
             <a:r>
-              <a:rPr lang="en-US" sz="1700" dirty="0">
+              <a:rPr lang="en-US" sz="1900" dirty="0">
                 <a:solidFill>
                   <a:srgbClr val="141B26"/>
                 </a:solidFill>
               </a:rPr>
               <a:t>Ways to preserve biodiversity: ban hunting of certain animals, set up nature reserves, run breeding programmes.</a:t>
             </a:r>
-            <a:endParaRPr lang="en-US" sz="1700" dirty="0"/>
-          </a:p>
-          <a:p>
-            <a:pPr marL="228600" indent="-228600">
+            <a:endParaRPr lang="en-US" sz="1900" dirty="0"/>
+          </a:p>
+          <a:p>
+            <a:pPr marL="304800" indent="-304800">
               <a:spcAft>
-                <a:spcPts val="600"/>
+                <a:spcPts val="800"/>
               </a:spcAft>
               <a:buSzPct val="100000"/>
               <a:buChar char="•"/>
             </a:pPr>
             <a:r>
-              <a:rPr lang="en-US" sz="1700" dirty="0">
+              <a:rPr lang="en-US" sz="1900" dirty="0">
                 <a:solidFill>
                   <a:srgbClr val="141B26"/>
                 </a:solidFill>
               </a:rPr>
               <a:t>Gene banks store seeds, gametes or cells at low temperatures, so a species can be produced again if it becomes extinct in the wild.</a:t>
             </a:r>
-            <a:endParaRPr lang="en-US" sz="1700" dirty="0"/>
+            <a:endParaRPr lang="en-US" sz="1900" dirty="0"/>
           </a:p>
         </p:txBody>
       </p:sp>
@@ -7994,7 +7883,7 @@
         <p:spPr>
           <a:xfrm>
             <a:off x="6583680" y="4908024"/>
-            <a:ext cx="5029200" cy="502920"/>
+            <a:ext cx="5029200" cy="548640"/>
           </a:xfrm>
           <a:prstGeom prst="rect">
             <a:avLst/>
@@ -8010,7 +7899,7 @@
               <a:buNone/>
             </a:pPr>
             <a:r>
-              <a:rPr lang="en-US" sz="1100" dirty="0">
+              <a:rPr lang="en-US" sz="1300" dirty="0">
                 <a:solidFill>
                   <a:srgbClr val="141B26"/>
                 </a:solidFill>
@@ -8020,21 +7909,21 @@
             <a:pPr algn="l" indent="0" marL="0">
               <a:buNone/>
             </a:pPr>
-            <a:endParaRPr lang="en-US" sz="1100" dirty="0"/>
+            <a:endParaRPr lang="en-US" sz="1300" dirty="0"/>
           </a:p>
           <a:p>
             <a:pPr algn="l" indent="0" marL="0">
               <a:buNone/>
             </a:pPr>
             <a:r>
-              <a:rPr lang="en-US" sz="800" dirty="0">
+              <a:rPr lang="en-US" sz="900" dirty="0">
                 <a:solidFill>
                   <a:srgbClr val="5B6574"/>
                 </a:solidFill>
               </a:rPr>
               <a:t>Image: the tinz, CC BY 2.0, via Wikimedia Commons</a:t>
             </a:r>
-            <a:endParaRPr lang="en-US" sz="1100" dirty="0"/>
+            <a:endParaRPr lang="en-US" sz="1300" dirty="0"/>
           </a:p>
         </p:txBody>
       </p:sp>
@@ -8081,16 +7970,14 @@
           <a:ln/>
         </p:spPr>
         <p:txBody>
-          <a:bodyPr wrap="square" lIns="0" tIns="0" rIns="0" bIns="0" rtlCol="0" anchor="ctr">
-            <a:normAutofit/>
-          </a:bodyPr>
+          <a:bodyPr wrap="square" lIns="0" tIns="0" rIns="0" bIns="0" rtlCol="0" anchor="ctr"/>
           <a:lstStyle/>
           <a:p>
             <a:pPr indent="0" marL="0">
               <a:buNone/>
             </a:pPr>
             <a:r>
-              <a:rPr lang="en-US" sz="1400" b="1" dirty="0">
+              <a:rPr lang="en-US" sz="1700" b="1" dirty="0">
                 <a:solidFill>
                   <a:srgbClr val="7B3A8E"/>
                 </a:solidFill>
@@ -8101,14 +7988,14 @@
               <a:buNone/>
             </a:pPr>
             <a:r>
-              <a:rPr lang="en-US" sz="1400" dirty="0">
+              <a:rPr lang="en-US" sz="1700" dirty="0">
                 <a:solidFill>
                   <a:srgbClr val="141B26"/>
                 </a:solidFill>
               </a:rPr>
               <a:t>Protect the habitat, protect the animals, and keep a frozen back-up of the genes.</a:t>
             </a:r>
-            <a:endParaRPr lang="en-US" sz="1400" dirty="0"/>
+            <a:endParaRPr lang="en-US" sz="1700" dirty="0"/>
           </a:p>
         </p:txBody>
       </p:sp>
@@ -8308,14 +8195,14 @@
               <a:buNone/>
             </a:pPr>
             <a:r>
-              <a:rPr lang="en-US" sz="1400" i="1" dirty="0">
+              <a:rPr lang="en-US" sz="1600" i="1" dirty="0">
                 <a:solidFill>
                   <a:srgbClr val="5B6574"/>
                 </a:solidFill>
               </a:rPr>
               <a:t>Mini whiteboards. Short answers.</a:t>
             </a:r>
-            <a:endParaRPr lang="en-US" sz="1400" dirty="0"/>
+            <a:endParaRPr lang="en-US" sz="1600" dirty="0"/>
           </a:p>
         </p:txBody>
       </p:sp>
@@ -8364,16 +8251,14 @@
           <a:ln/>
         </p:spPr>
         <p:txBody>
-          <a:bodyPr wrap="square" lIns="0" tIns="0" rIns="0" bIns="0" rtlCol="0" anchor="ctr">
-            <a:normAutofit/>
-          </a:bodyPr>
+          <a:bodyPr wrap="square" lIns="0" tIns="0" rIns="0" bIns="0" rtlCol="0" anchor="ctr"/>
           <a:lstStyle/>
           <a:p>
             <a:pPr indent="0" marL="0">
               <a:buNone/>
             </a:pPr>
             <a:r>
-              <a:rPr lang="en-US" sz="1600" b="1" dirty="0">
+              <a:rPr lang="en-US" sz="2000" b="1" dirty="0">
                 <a:solidFill>
                   <a:srgbClr val="7B3A8E"/>
                 </a:solidFill>
@@ -8384,14 +8269,14 @@
               <a:buNone/>
             </a:pPr>
             <a:r>
-              <a:rPr lang="en-US" sz="1600" dirty="0">
+              <a:rPr lang="en-US" sz="2000" dirty="0">
                 <a:solidFill>
                   <a:srgbClr val="141B26"/>
                 </a:solidFill>
               </a:rPr>
               <a:t>What does 'endangered' mean?</a:t>
             </a:r>
-            <a:endParaRPr lang="en-US" sz="1600" dirty="0"/>
+            <a:endParaRPr lang="en-US" sz="2000" dirty="0"/>
           </a:p>
         </p:txBody>
       </p:sp>
@@ -8440,16 +8325,14 @@
           <a:ln/>
         </p:spPr>
         <p:txBody>
-          <a:bodyPr wrap="square" lIns="0" tIns="0" rIns="0" bIns="0" rtlCol="0" anchor="ctr">
-            <a:normAutofit/>
-          </a:bodyPr>
+          <a:bodyPr wrap="square" lIns="0" tIns="0" rIns="0" bIns="0" rtlCol="0" anchor="ctr"/>
           <a:lstStyle/>
           <a:p>
             <a:pPr indent="0" marL="0">
               <a:buNone/>
             </a:pPr>
             <a:r>
-              <a:rPr lang="en-US" sz="1600" b="1" dirty="0">
+              <a:rPr lang="en-US" sz="2000" b="1" dirty="0">
                 <a:solidFill>
                   <a:srgbClr val="7B3A8E"/>
                 </a:solidFill>
@@ -8460,14 +8343,14 @@
               <a:buNone/>
             </a:pPr>
             <a:r>
-              <a:rPr lang="en-US" sz="1600" dirty="0">
+              <a:rPr lang="en-US" sz="2000" dirty="0">
                 <a:solidFill>
                   <a:srgbClr val="141B26"/>
                 </a:solidFill>
               </a:rPr>
               <a:t>Hunting: abiotic or biotic factor?</a:t>
             </a:r>
-            <a:endParaRPr lang="en-US" sz="1600" dirty="0"/>
+            <a:endParaRPr lang="en-US" sz="2000" dirty="0"/>
           </a:p>
         </p:txBody>
       </p:sp>
@@ -8516,16 +8399,14 @@
           <a:ln/>
         </p:spPr>
         <p:txBody>
-          <a:bodyPr wrap="square" lIns="0" tIns="0" rIns="0" bIns="0" rtlCol="0" anchor="ctr">
-            <a:normAutofit/>
-          </a:bodyPr>
+          <a:bodyPr wrap="square" lIns="0" tIns="0" rIns="0" bIns="0" rtlCol="0" anchor="ctr"/>
           <a:lstStyle/>
           <a:p>
             <a:pPr indent="0" marL="0">
               <a:buNone/>
             </a:pPr>
             <a:r>
-              <a:rPr lang="en-US" sz="1600" b="1" dirty="0">
+              <a:rPr lang="en-US" sz="2000" b="1" dirty="0">
                 <a:solidFill>
                   <a:srgbClr val="7B3A8E"/>
                 </a:solidFill>
@@ -8536,14 +8417,14 @@
               <a:buNone/>
             </a:pPr>
             <a:r>
-              <a:rPr lang="en-US" sz="1600" dirty="0">
+              <a:rPr lang="en-US" sz="2000" dirty="0">
                 <a:solidFill>
                   <a:srgbClr val="141B26"/>
                 </a:solidFill>
               </a:rPr>
               <a:t>Give one adaptation that red and grey squirrels share.</a:t>
             </a:r>
-            <a:endParaRPr lang="en-US" sz="1600" dirty="0"/>
+            <a:endParaRPr lang="en-US" sz="2000" dirty="0"/>
           </a:p>
         </p:txBody>
       </p:sp>
@@ -8592,16 +8473,14 @@
           <a:ln/>
         </p:spPr>
         <p:txBody>
-          <a:bodyPr wrap="square" lIns="0" tIns="0" rIns="0" bIns="0" rtlCol="0" anchor="ctr">
-            <a:normAutofit/>
-          </a:bodyPr>
+          <a:bodyPr wrap="square" lIns="0" tIns="0" rIns="0" bIns="0" rtlCol="0" anchor="ctr"/>
           <a:lstStyle/>
           <a:p>
             <a:pPr indent="0" marL="0">
               <a:buNone/>
             </a:pPr>
             <a:r>
-              <a:rPr lang="en-US" sz="1600" b="1" dirty="0">
+              <a:rPr lang="en-US" sz="2000" b="1" dirty="0">
                 <a:solidFill>
                   <a:srgbClr val="7B3A8E"/>
                 </a:solidFill>
@@ -8612,14 +8491,14 @@
               <a:buNone/>
             </a:pPr>
             <a:r>
-              <a:rPr lang="en-US" sz="1600" dirty="0">
+              <a:rPr lang="en-US" sz="2000" dirty="0">
                 <a:solidFill>
                   <a:srgbClr val="141B26"/>
                 </a:solidFill>
               </a:rPr>
               <a:t>Why do grey squirrels get more acorns than reds?</a:t>
             </a:r>
-            <a:endParaRPr lang="en-US" sz="1600" dirty="0"/>
+            <a:endParaRPr lang="en-US" sz="2000" dirty="0"/>
           </a:p>
         </p:txBody>
       </p:sp>
@@ -8668,16 +8547,14 @@
           <a:ln/>
         </p:spPr>
         <p:txBody>
-          <a:bodyPr wrap="square" lIns="0" tIns="0" rIns="0" bIns="0" rtlCol="0" anchor="ctr">
-            <a:normAutofit/>
-          </a:bodyPr>
+          <a:bodyPr wrap="square" lIns="0" tIns="0" rIns="0" bIns="0" rtlCol="0" anchor="ctr"/>
           <a:lstStyle/>
           <a:p>
             <a:pPr indent="0" marL="0">
               <a:buNone/>
             </a:pPr>
             <a:r>
-              <a:rPr lang="en-US" sz="1600" b="1" dirty="0">
+              <a:rPr lang="en-US" sz="2000" b="1" dirty="0">
                 <a:solidFill>
                   <a:srgbClr val="7B3A8E"/>
                 </a:solidFill>
@@ -8688,14 +8565,14 @@
               <a:buNone/>
             </a:pPr>
             <a:r>
-              <a:rPr lang="en-US" sz="1600" dirty="0">
+              <a:rPr lang="en-US" sz="2000" dirty="0">
                 <a:solidFill>
                   <a:srgbClr val="141B26"/>
                 </a:solidFill>
               </a:rPr>
               <a:t>Give one way of preserving biodiversity.</a:t>
             </a:r>
-            <a:endParaRPr lang="en-US" sz="1600" dirty="0"/>
+            <a:endParaRPr lang="en-US" sz="2000" dirty="0"/>
           </a:p>
         </p:txBody>
       </p:sp>
